--- a/curso/pptx/S86.pptx
+++ b/curso/pptx/S86.pptx
@@ -4214,7 +4214,7 @@
                 </a:solidFill>
                 <a:latin typeface="Nunito Sans"/>
               </a:rPr>
-              <a:t>Omar cree que los de un barrio inventado son conflictivos. Si uno hace algo mal, lo recuerda durante meses. Los cien que no hacen nada malo, ni los ve.</a:t>
+              <a:t>Un chico cree que los de un barrio inventado son conflictivos. Si uno hace algo mal, lo recuerda durante meses. Los cien que no hacen nada malo, ni los ve.</a:t>
             </a:r>
           </a:p>
         </p:txBody>
@@ -4262,7 +4262,7 @@
                 </a:solidFill>
                 <a:latin typeface="Nunito Sans"/>
               </a:rPr>
-              <a:t>Omar se fija solo en lo que confirma su idea: sesgo de confirmación (sesión 44).</a:t>
+              <a:t>Ese chico se fija solo en lo que confirma su idea: sesgo de confirmación (sesión 44).</a:t>
             </a:r>
           </a:p>
           <a:p>
@@ -4523,7 +4523,7 @@
                 </a:solidFill>
                 <a:latin typeface="Nunito Sans"/>
               </a:rPr>
-              <a:t>En el vestuario, Kevin suelta «Eso es de gais» cada vez que algo no le gusta. Cuando se lo dicen, contesta: «Solo es una broma. No tengo nada contra nadie».</a:t>
+              <a:t>En el vestuario, un chico suelta «Eso es de gais» cada vez que algo no le gusta. Cuando se lo dicen, contesta: «Solo es una broma. No tengo nada contra nadie».</a:t>
             </a:r>
           </a:p>
         </p:txBody>
@@ -4571,7 +4571,7 @@
                 </a:solidFill>
                 <a:latin typeface="Nunito Sans"/>
               </a:rPr>
-              <a:t>Kevin no quiere hacer daño. ¿Entonces no pasa nada?</a:t>
+              <a:t>Ese chico no quiere hacer daño. ¿Entonces no pasa nada?</a:t>
             </a:r>
           </a:p>
           <a:p>
@@ -4596,7 +4596,7 @@
                 </a:solidFill>
                 <a:latin typeface="Nunito Sans"/>
               </a:rPr>
-              <a:t>Parece que no: Kevin no odia a nadie y lo dice riéndose.</a:t>
+              <a:t>Parece que no: no odia a nadie y lo dice riéndose.</a:t>
             </a:r>
           </a:p>
           <a:p>

--- a/curso/pptx/S86.pptx
+++ b/curso/pptx/S86.pptx
@@ -23,7 +23,6 @@
     <p:sldId id="271" r:id="rId23"/>
     <p:sldId id="272" r:id="rId24"/>
     <p:sldId id="273" r:id="rId25"/>
-    <p:sldId id="274" r:id="rId26"/>
   </p:sldIdLst>
   <p:sldSz cx="12192000" cy="6858000" type="screen4x3"/>
   <p:notesSz cx="6858000" cy="9144000"/>
@@ -3537,7 +3536,7 @@
                 </a:solidFill>
                 <a:latin typeface="Nunito Sans"/>
               </a:rPr>
-              <a:t>PENSAMIENTO CRÍTICO · SESIÓN 86 · UNIDAD 19 · GLOCAL: CULTURAS Y MIGRACIONES</a:t>
+              <a:t>PENSAMIENTO CRÍTICO · SESIÓN 86 · UNIDAD 19 · MODAS, OCIO Y FUTURO</a:t>
             </a:r>
           </a:p>
         </p:txBody>
@@ -3576,7 +3575,7 @@
                 </a:solidFill>
                 <a:latin typeface="Fredoka"/>
               </a:rPr>
-              <a:t>Aporofobia, racismo y otras exclusiones</a:t>
+              <a:t>¿Y después de la ESO?</a:t>
             </a:r>
           </a:p>
         </p:txBody>
@@ -3615,7 +3614,7 @@
                 </a:solidFill>
                 <a:latin typeface="Nunito Sans"/>
               </a:rPr>
-              <a:t>Un prejuicio es juzgar a alguien por su grupo antes de conocerle; así nacen la aporofobia, el racismo y otras formas de exclusión.</a:t>
+              <a:t>Tras 4.º de ESO hay varios caminos que se cruzan; lo que cuenta es elegir con buenas razones, conociendo derechos y deberes.</a:t>
             </a:r>
           </a:p>
         </p:txBody>
@@ -3634,7 +3633,7 @@
     <p:bg>
       <p:bgPr>
         <a:solidFill>
-          <a:srgbClr val="1F2A44"/>
+          <a:srgbClr val="FBF7EF"/>
         </a:solidFill>
         <a:effectLst/>
       </p:bgPr>
@@ -3654,8 +3653,8 @@
         </p:nvSpPr>
         <p:spPr>
           <a:xfrm>
-            <a:off x="640000" y="2300000"/>
-            <a:ext cx="10912000" cy="500000"/>
+            <a:off x="640000" y="380000"/>
+            <a:ext cx="10912000" cy="420000"/>
           </a:xfrm>
           <a:prstGeom prst="rect">
             <a:avLst/>
@@ -3670,17 +3669,17 @@
           <a:p>
             <a:pPr>
               <a:spcAft>
-                <a:spcPts val="810"/>
+                <a:spcPts val="630"/>
               </a:spcAft>
             </a:pPr>
             <a:r>
-              <a:rPr sz="1800" b="1">
-                <a:solidFill>
-                  <a:srgbClr val="F4B183"/>
-                </a:solidFill>
-                <a:latin typeface="Nunito Sans"/>
-              </a:rPr>
-              <a:t>BLOQUE 2</a:t>
+              <a:rPr sz="1400" b="1">
+                <a:solidFill>
+                  <a:srgbClr val="E8793A"/>
+                </a:solidFill>
+                <a:latin typeface="Nunito Sans"/>
+              </a:rPr>
+              <a:t>BLOQUE 2 · CASOS RESUELTOS</a:t>
             </a:r>
           </a:p>
         </p:txBody>
@@ -3693,7 +3692,7 @@
         </p:nvSpPr>
         <p:spPr>
           <a:xfrm>
-            <a:off x="640000" y="2800000"/>
+            <a:off x="640000" y="760000"/>
             <a:ext cx="10912000" cy="800000"/>
           </a:xfrm>
           <a:prstGeom prst="rect">
@@ -3709,17 +3708,240 @@
           <a:p>
             <a:pPr>
               <a:spcAft>
-                <a:spcPts val="2160"/>
+                <a:spcPts val="1710"/>
               </a:spcAft>
             </a:pPr>
             <a:r>
-              <a:rPr sz="4800" b="1">
-                <a:solidFill>
-                  <a:srgbClr val="FBF7EF"/>
+              <a:rPr sz="3800" b="1">
+                <a:solidFill>
+                  <a:srgbClr val="1F2A44"/>
                 </a:solidFill>
                 <a:latin typeface="Fredoka"/>
               </a:rPr>
-              <a:t>Casos resueltos</a:t>
+              <a:t>Caso 1 · Elegir con razones</a:t>
+            </a:r>
+          </a:p>
+        </p:txBody>
+      </p:sp>
+      <p:sp>
+        <p:nvSpPr>
+          <p:cNvPr id="4" name="Rectangle 3"/>
+          <p:cNvSpPr/>
+          <p:nvPr/>
+        </p:nvSpPr>
+        <p:spPr>
+          <a:xfrm>
+            <a:off x="640000" y="1600000"/>
+            <a:ext cx="10912000" cy="1100000"/>
+          </a:xfrm>
+          <a:prstGeom prst="rect">
+            <a:avLst/>
+          </a:prstGeom>
+          <a:solidFill>
+            <a:srgbClr val="FFFFFF"/>
+          </a:solidFill>
+          <a:ln>
+            <a:noFill/>
+          </a:ln>
+        </p:spPr>
+        <p:style>
+          <a:lnRef idx="1">
+            <a:schemeClr val="accent1"/>
+          </a:lnRef>
+          <a:fillRef idx="3">
+            <a:schemeClr val="accent1"/>
+          </a:fillRef>
+          <a:effectRef idx="2">
+            <a:schemeClr val="accent1"/>
+          </a:effectRef>
+          <a:fontRef idx="minor">
+            <a:schemeClr val="lt1"/>
+          </a:fontRef>
+        </p:style>
+        <p:txBody>
+          <a:bodyPr rtlCol="0" anchor="ctr"/>
+          <a:lstStyle/>
+          <a:p>
+            <a:pPr algn="ctr"/>
+          </a:p>
+        </p:txBody>
+      </p:sp>
+      <p:sp>
+        <p:nvSpPr>
+          <p:cNvPr id="5" name="TextBox 4"/>
+          <p:cNvSpPr txBox="1"/>
+          <p:nvPr/>
+        </p:nvSpPr>
+        <p:spPr>
+          <a:xfrm>
+            <a:off x="840000" y="1650000"/>
+            <a:ext cx="10512000" cy="1000000"/>
+          </a:xfrm>
+          <a:prstGeom prst="rect">
+            <a:avLst/>
+          </a:prstGeom>
+          <a:noFill/>
+        </p:spPr>
+        <p:txBody>
+          <a:bodyPr wrap="square" anchor="ctr">
+            <a:spAutoFit/>
+          </a:bodyPr>
+          <a:lstStyle/>
+          <a:p>
+            <a:pPr>
+              <a:spcAft>
+                <a:spcPts val="1170"/>
+              </a:spcAft>
+            </a:pPr>
+            <a:r>
+              <a:rPr sz="2600" b="1">
+                <a:solidFill>
+                  <a:srgbClr val="1F2A44"/>
+                </a:solidFill>
+                <a:latin typeface="Nunito Sans"/>
+              </a:rPr>
+              <a:t>Un chico no sabe qué hacer tras 4.º. Le gusta arreglar cosas y se le dan bien las mates. Su cuadrilla va a Bachillerato. (Ejemplo inventado.)</a:t>
+            </a:r>
+          </a:p>
+        </p:txBody>
+      </p:sp>
+      <p:sp>
+        <p:nvSpPr>
+          <p:cNvPr id="6" name="TextBox 5"/>
+          <p:cNvSpPr txBox="1"/>
+          <p:nvPr/>
+        </p:nvSpPr>
+        <p:spPr>
+          <a:xfrm>
+            <a:off x="640000" y="2900000"/>
+            <a:ext cx="10912000" cy="3500000"/>
+          </a:xfrm>
+          <a:prstGeom prst="rect">
+            <a:avLst/>
+          </a:prstGeom>
+          <a:noFill/>
+        </p:spPr>
+        <p:txBody>
+          <a:bodyPr wrap="square">
+            <a:spAutoFit/>
+          </a:bodyPr>
+          <a:lstStyle/>
+          <a:p>
+            <a:pPr>
+              <a:spcAft>
+                <a:spcPts val="1080"/>
+              </a:spcAft>
+            </a:pPr>
+            <a:r>
+              <a:rPr sz="2400" b="1">
+                <a:solidFill>
+                  <a:srgbClr val="E8793A"/>
+                </a:solidFill>
+                <a:latin typeface="Nunito Sans"/>
+              </a:rPr>
+              <a:t>1. </a:t>
+            </a:r>
+            <a:r>
+              <a:rPr sz="2400" b="0">
+                <a:solidFill>
+                  <a:srgbClr val="1F2A44"/>
+                </a:solidFill>
+                <a:latin typeface="Nunito Sans"/>
+              </a:rPr>
+              <a:t>Primero, razones suyas: qué le gusta, qué se le da bien, a qué quiere dedicarse.</a:t>
+            </a:r>
+          </a:p>
+          <a:p>
+            <a:pPr>
+              <a:spcAft>
+                <a:spcPts val="1080"/>
+              </a:spcAft>
+            </a:pPr>
+            <a:r>
+              <a:rPr sz="2400" b="1">
+                <a:solidFill>
+                  <a:srgbClr val="E8793A"/>
+                </a:solidFill>
+                <a:latin typeface="Nunito Sans"/>
+              </a:rPr>
+              <a:t>2. </a:t>
+            </a:r>
+            <a:r>
+              <a:rPr sz="2400" b="0">
+                <a:solidFill>
+                  <a:srgbClr val="1F2A44"/>
+                </a:solidFill>
+                <a:latin typeface="Nunito Sans"/>
+              </a:rPr>
+              <a:t>Después, información: el </a:t>
+            </a:r>
+            <a:r>
+              <a:rPr sz="2400" b="1">
+                <a:solidFill>
+                  <a:srgbClr val="1F2A44"/>
+                </a:solidFill>
+                <a:latin typeface="Nunito Sans"/>
+              </a:rPr>
+              <a:t>orientador</a:t>
+            </a:r>
+            <a:r>
+              <a:rPr sz="2400" b="0">
+                <a:solidFill>
+                  <a:srgbClr val="1F2A44"/>
+                </a:solidFill>
+                <a:latin typeface="Nunito Sans"/>
+              </a:rPr>
+              <a:t> del centro, jornadas de puertas abiertas, gente que lo estudia.</a:t>
+            </a:r>
+          </a:p>
+          <a:p>
+            <a:pPr>
+              <a:spcAft>
+                <a:spcPts val="1080"/>
+              </a:spcAft>
+            </a:pPr>
+            <a:r>
+              <a:rPr sz="2400" b="1">
+                <a:solidFill>
+                  <a:srgbClr val="E8793A"/>
+                </a:solidFill>
+                <a:latin typeface="Nunito Sans"/>
+              </a:rPr>
+              <a:t>3. </a:t>
+            </a:r>
+            <a:r>
+              <a:rPr sz="2400" b="0">
+                <a:solidFill>
+                  <a:srgbClr val="1F2A44"/>
+                </a:solidFill>
+                <a:latin typeface="Nunito Sans"/>
+              </a:rPr>
+              <a:t>¿Bachillerato de Ciencias o una FP de mantenimiento? Las dos pueden encajar con sus razones.</a:t>
+            </a:r>
+          </a:p>
+          <a:p>
+            <a:pPr>
+              <a:spcAft>
+                <a:spcPts val="1080"/>
+              </a:spcAft>
+            </a:pPr>
+            <a:r>
+              <a:rPr sz="2400" b="1">
+                <a:solidFill>
+                  <a:srgbClr val="E8793A"/>
+                </a:solidFill>
+                <a:latin typeface="Nunito Sans"/>
+              </a:rPr>
+              <a:t>4. </a:t>
+            </a:r>
+            <a:r>
+              <a:rPr sz="2400" b="0">
+                <a:solidFill>
+                  <a:srgbClr val="1F2A44"/>
+                </a:solidFill>
+                <a:latin typeface="Nunito Sans"/>
+              </a:rPr>
+              <a:t>Conclusión: se elige con razones propias e información. La cuadrilla importa, pero no decide por ti.</a:t>
             </a:r>
           </a:p>
         </p:txBody>
@@ -3823,7 +4045,7 @@
                 </a:solidFill>
                 <a:latin typeface="Fredoka"/>
               </a:rPr>
-              <a:t>Caso 1 · Turistas y sin hogar</a:t>
+              <a:t>Caso 2 · La nota del examen</a:t>
             </a:r>
           </a:p>
         </p:txBody>
@@ -3905,7 +4127,7 @@
                 </a:solidFill>
                 <a:latin typeface="Nunito Sans"/>
               </a:rPr>
-              <a:t>En el Casco Viejo, un camarero atiende con sonrisas a unos turistas extranjeros que gastan mucho. Cuando entra un hombre sin hogar, nacido en Bilbao, le dice que se vaya.</a:t>
+              <a:t>Una chica cree que su examen está mal corregido: una respuesta correcta tiene un cero. Quiere protestar en clase a gritos. (Ejemplo inventado.)</a:t>
             </a:r>
           </a:p>
         </p:txBody>
@@ -3953,7 +4175,25 @@
                 </a:solidFill>
                 <a:latin typeface="Nunito Sans"/>
               </a:rPr>
-              <a:t>¿Rechaza a los de fuera? No: a los turistas extranjeros los trata muy bien.</a:t>
+              <a:t>Tiene </a:t>
+            </a:r>
+            <a:r>
+              <a:rPr sz="2400" b="1">
+                <a:solidFill>
+                  <a:srgbClr val="1F2A44"/>
+                </a:solidFill>
+                <a:latin typeface="Nunito Sans"/>
+              </a:rPr>
+              <a:t>derecho</a:t>
+            </a:r>
+            <a:r>
+              <a:rPr sz="2400" b="0">
+                <a:solidFill>
+                  <a:srgbClr val="1F2A44"/>
+                </a:solidFill>
+                <a:latin typeface="Nunito Sans"/>
+              </a:rPr>
+              <a:t> a una evaluación objetiva y a pedir que se revise.</a:t>
             </a:r>
           </a:p>
           <a:p>
@@ -3978,7 +4218,25 @@
                 </a:solidFill>
                 <a:latin typeface="Nunito Sans"/>
               </a:rPr>
-              <a:t>Al hombre sin hogar lo echa, y es de aquí. ¿Qué le molesta de él? Su pobreza.</a:t>
+              <a:t>También tiene </a:t>
+            </a:r>
+            <a:r>
+              <a:rPr sz="2400" b="1">
+                <a:solidFill>
+                  <a:srgbClr val="1F2A44"/>
+                </a:solidFill>
+                <a:latin typeface="Nunito Sans"/>
+              </a:rPr>
+              <a:t>deberes</a:t>
+            </a:r>
+            <a:r>
+              <a:rPr sz="2400" b="0">
+                <a:solidFill>
+                  <a:srgbClr val="1F2A44"/>
+                </a:solidFill>
+                <a:latin typeface="Nunito Sans"/>
+              </a:rPr>
+              <a:t>: respetar al profesorado y a la clase.</a:t>
             </a:r>
           </a:p>
           <a:p>
@@ -4003,7 +4261,7 @@
                 </a:solidFill>
                 <a:latin typeface="Nunito Sans"/>
               </a:rPr>
-              <a:t>Es justo la idea de Adela Cortina: el rechazo va contra el pobre.</a:t>
+              <a:t>Camino: pedir ver el examen y preguntar. Si sigue sin estar de acuerdo, puede hacer una reclamación.</a:t>
             </a:r>
           </a:p>
           <a:p>
@@ -4028,7 +4286,7 @@
                 </a:solidFill>
                 <a:latin typeface="Nunito Sans"/>
               </a:rPr>
-              <a:t>Conclusión: es aporofobia. A veces lo que parece xenofobia es, sobre todo, rechazo al pobre.</a:t>
+              <a:t>Conclusión: derechos y deberes van juntos. Defender un derecho no exige saltarse un deber.</a:t>
             </a:r>
           </a:p>
         </p:txBody>
@@ -4042,6 +4300,462 @@
 </file>
 
 <file path=ppt/slides/slide12.xml><?xml version="1.0" encoding="utf-8"?>
+<p:sld xmlns:a="http://schemas.openxmlformats.org/drawingml/2006/main" xmlns:p="http://schemas.openxmlformats.org/presentationml/2006/main" xmlns:r="http://schemas.openxmlformats.org/officeDocument/2006/relationships">
+  <p:cSld>
+    <p:bg>
+      <p:bgPr>
+        <a:solidFill>
+          <a:srgbClr val="F6C9A8"/>
+        </a:solidFill>
+        <a:effectLst/>
+      </p:bgPr>
+    </p:bg>
+    <p:spTree>
+      <p:nvGrpSpPr>
+        <p:cNvPr id="1" name=""/>
+        <p:cNvGrpSpPr/>
+        <p:nvPr/>
+      </p:nvGrpSpPr>
+      <p:grpSpPr/>
+      <p:sp>
+        <p:nvSpPr>
+          <p:cNvPr id="2" name="TextBox 1"/>
+          <p:cNvSpPr txBox="1"/>
+          <p:nvPr/>
+        </p:nvSpPr>
+        <p:spPr>
+          <a:xfrm>
+            <a:off x="640000" y="380000"/>
+            <a:ext cx="10912000" cy="420000"/>
+          </a:xfrm>
+          <a:prstGeom prst="rect">
+            <a:avLst/>
+          </a:prstGeom>
+          <a:noFill/>
+        </p:spPr>
+        <p:txBody>
+          <a:bodyPr wrap="square">
+            <a:spAutoFit/>
+          </a:bodyPr>
+          <a:lstStyle/>
+          <a:p>
+            <a:pPr>
+              <a:spcAft>
+                <a:spcPts val="630"/>
+              </a:spcAft>
+            </a:pPr>
+            <a:r>
+              <a:rPr sz="1400" b="1">
+                <a:solidFill>
+                  <a:srgbClr val="1F2A44"/>
+                </a:solidFill>
+                <a:latin typeface="Nunito Sans"/>
+              </a:rPr>
+              <a:t>CASO TRAMPA · BLOQUE 2 · CASOS RESUELTOS</a:t>
+            </a:r>
+          </a:p>
+        </p:txBody>
+      </p:sp>
+      <p:sp>
+        <p:nvSpPr>
+          <p:cNvPr id="3" name="TextBox 2"/>
+          <p:cNvSpPr txBox="1"/>
+          <p:nvPr/>
+        </p:nvSpPr>
+        <p:spPr>
+          <a:xfrm>
+            <a:off x="640000" y="760000"/>
+            <a:ext cx="10912000" cy="800000"/>
+          </a:xfrm>
+          <a:prstGeom prst="rect">
+            <a:avLst/>
+          </a:prstGeom>
+          <a:noFill/>
+        </p:spPr>
+        <p:txBody>
+          <a:bodyPr wrap="square">
+            <a:spAutoFit/>
+          </a:bodyPr>
+          <a:lstStyle/>
+          <a:p>
+            <a:pPr>
+              <a:spcAft>
+                <a:spcPts val="1710"/>
+              </a:spcAft>
+            </a:pPr>
+            <a:r>
+              <a:rPr sz="3800" b="1">
+                <a:solidFill>
+                  <a:srgbClr val="1F2A44"/>
+                </a:solidFill>
+                <a:latin typeface="Fredoka"/>
+              </a:rPr>
+              <a:t>⚠ Con la cuadrilla, ¿mal?</a:t>
+            </a:r>
+          </a:p>
+        </p:txBody>
+      </p:sp>
+      <p:sp>
+        <p:nvSpPr>
+          <p:cNvPr id="4" name="Rectangle 3"/>
+          <p:cNvSpPr/>
+          <p:nvPr/>
+        </p:nvSpPr>
+        <p:spPr>
+          <a:xfrm>
+            <a:off x="640000" y="1600000"/>
+            <a:ext cx="10912000" cy="1100000"/>
+          </a:xfrm>
+          <a:prstGeom prst="rect">
+            <a:avLst/>
+          </a:prstGeom>
+          <a:solidFill>
+            <a:srgbClr val="FBF7EF"/>
+          </a:solidFill>
+          <a:ln>
+            <a:noFill/>
+          </a:ln>
+        </p:spPr>
+        <p:style>
+          <a:lnRef idx="1">
+            <a:schemeClr val="accent1"/>
+          </a:lnRef>
+          <a:fillRef idx="3">
+            <a:schemeClr val="accent1"/>
+          </a:fillRef>
+          <a:effectRef idx="2">
+            <a:schemeClr val="accent1"/>
+          </a:effectRef>
+          <a:fontRef idx="minor">
+            <a:schemeClr val="lt1"/>
+          </a:fontRef>
+        </p:style>
+        <p:txBody>
+          <a:bodyPr rtlCol="0" anchor="ctr"/>
+          <a:lstStyle/>
+          <a:p>
+            <a:pPr algn="ctr"/>
+          </a:p>
+        </p:txBody>
+      </p:sp>
+      <p:sp>
+        <p:nvSpPr>
+          <p:cNvPr id="5" name="TextBox 4"/>
+          <p:cNvSpPr txBox="1"/>
+          <p:nvPr/>
+        </p:nvSpPr>
+        <p:spPr>
+          <a:xfrm>
+            <a:off x="840000" y="1650000"/>
+            <a:ext cx="10512000" cy="1000000"/>
+          </a:xfrm>
+          <a:prstGeom prst="rect">
+            <a:avLst/>
+          </a:prstGeom>
+          <a:noFill/>
+        </p:spPr>
+        <p:txBody>
+          <a:bodyPr wrap="square" anchor="ctr">
+            <a:spAutoFit/>
+          </a:bodyPr>
+          <a:lstStyle/>
+          <a:p>
+            <a:pPr>
+              <a:spcAft>
+                <a:spcPts val="1170"/>
+              </a:spcAft>
+            </a:pPr>
+            <a:r>
+              <a:rPr sz="2600" b="1">
+                <a:solidFill>
+                  <a:srgbClr val="1F2A44"/>
+                </a:solidFill>
+                <a:latin typeface="Nunito Sans"/>
+              </a:rPr>
+              <a:t>Una chica irá a Bachillerato de Humanidades. Le encanta la historia y quiere ser periodista. Además, van tres amigas suyas. (Ejemplo inventado.)</a:t>
+            </a:r>
+          </a:p>
+        </p:txBody>
+      </p:sp>
+      <p:sp>
+        <p:nvSpPr>
+          <p:cNvPr id="6" name="TextBox 5"/>
+          <p:cNvSpPr txBox="1"/>
+          <p:nvPr/>
+        </p:nvSpPr>
+        <p:spPr>
+          <a:xfrm>
+            <a:off x="640000" y="2900000"/>
+            <a:ext cx="10912000" cy="3500000"/>
+          </a:xfrm>
+          <a:prstGeom prst="rect">
+            <a:avLst/>
+          </a:prstGeom>
+          <a:noFill/>
+        </p:spPr>
+        <p:txBody>
+          <a:bodyPr wrap="square">
+            <a:spAutoFit/>
+          </a:bodyPr>
+          <a:lstStyle/>
+          <a:p>
+            <a:pPr>
+              <a:spcAft>
+                <a:spcPts val="1080"/>
+              </a:spcAft>
+            </a:pPr>
+            <a:r>
+              <a:rPr sz="2400" b="1">
+                <a:solidFill>
+                  <a:srgbClr val="E8793A"/>
+                </a:solidFill>
+                <a:latin typeface="Nunito Sans"/>
+              </a:rPr>
+              <a:t>1. </a:t>
+            </a:r>
+            <a:r>
+              <a:rPr sz="2400" b="0">
+                <a:solidFill>
+                  <a:srgbClr val="1F2A44"/>
+                </a:solidFill>
+                <a:latin typeface="Nunito Sans"/>
+              </a:rPr>
+              <a:t>Elige lo mismo que su grupo. ¿Se está dejando llevar?</a:t>
+            </a:r>
+          </a:p>
+          <a:p>
+            <a:pPr>
+              <a:spcAft>
+                <a:spcPts val="1080"/>
+              </a:spcAft>
+            </a:pPr>
+            <a:r>
+              <a:rPr sz="2400" b="1">
+                <a:solidFill>
+                  <a:srgbClr val="E8793A"/>
+                </a:solidFill>
+                <a:latin typeface="Nunito Sans"/>
+              </a:rPr>
+              <a:t>2. </a:t>
+            </a:r>
+            <a:r>
+              <a:rPr sz="2400" b="0">
+                <a:solidFill>
+                  <a:srgbClr val="1F2A44"/>
+                </a:solidFill>
+                <a:latin typeface="Nunito Sans"/>
+              </a:rPr>
+              <a:t>Parece que sí: hemos visto que seguir al grupo sin pensar es un error.</a:t>
+            </a:r>
+          </a:p>
+          <a:p>
+            <a:pPr>
+              <a:spcAft>
+                <a:spcPts val="1080"/>
+              </a:spcAft>
+            </a:pPr>
+            <a:r>
+              <a:rPr sz="2400" b="1">
+                <a:solidFill>
+                  <a:srgbClr val="E8793A"/>
+                </a:solidFill>
+                <a:latin typeface="Nunito Sans"/>
+              </a:rPr>
+              <a:t>3. </a:t>
+            </a:r>
+            <a:r>
+              <a:rPr sz="2400" b="0">
+                <a:solidFill>
+                  <a:srgbClr val="1F2A44"/>
+                </a:solidFill>
+                <a:latin typeface="Nunito Sans"/>
+              </a:rPr>
+              <a:t>Pero esa chica tiene razones propias: le gusta la historia y sabe a qué quiere dedicarse.</a:t>
+            </a:r>
+          </a:p>
+          <a:p>
+            <a:pPr>
+              <a:spcAft>
+                <a:spcPts val="1080"/>
+              </a:spcAft>
+            </a:pPr>
+            <a:r>
+              <a:rPr sz="2400" b="1">
+                <a:solidFill>
+                  <a:srgbClr val="E8793A"/>
+                </a:solidFill>
+                <a:latin typeface="Nunito Sans"/>
+              </a:rPr>
+              <a:t>4. </a:t>
+            </a:r>
+            <a:r>
+              <a:rPr sz="2400" b="0">
+                <a:solidFill>
+                  <a:srgbClr val="1F2A44"/>
+                </a:solidFill>
+                <a:latin typeface="Nunito Sans"/>
+              </a:rPr>
+              <a:t>Ir con amigas es una razón más, no la única. Eso no es dejarse llevar.</a:t>
+            </a:r>
+          </a:p>
+          <a:p>
+            <a:pPr>
+              <a:spcAft>
+                <a:spcPts val="1080"/>
+              </a:spcAft>
+            </a:pPr>
+            <a:r>
+              <a:rPr sz="2400" b="1">
+                <a:solidFill>
+                  <a:srgbClr val="E8793A"/>
+                </a:solidFill>
+                <a:latin typeface="Nunito Sans"/>
+              </a:rPr>
+              <a:t>5. </a:t>
+            </a:r>
+            <a:r>
+              <a:rPr sz="2400" b="0">
+                <a:solidFill>
+                  <a:srgbClr val="1F2A44"/>
+                </a:solidFill>
+                <a:latin typeface="Nunito Sans"/>
+              </a:rPr>
+              <a:t>Conclusión: coincidir con el grupo no es el error. El error es que el grupo sea la </a:t>
+            </a:r>
+            <a:r>
+              <a:rPr sz="2400" b="1">
+                <a:solidFill>
+                  <a:srgbClr val="1F2A44"/>
+                </a:solidFill>
+                <a:latin typeface="Nunito Sans"/>
+              </a:rPr>
+              <a:t>única</a:t>
+            </a:r>
+            <a:r>
+              <a:rPr sz="2400" b="0">
+                <a:solidFill>
+                  <a:srgbClr val="1F2A44"/>
+                </a:solidFill>
+                <a:latin typeface="Nunito Sans"/>
+              </a:rPr>
+              <a:t> razón.</a:t>
+            </a:r>
+          </a:p>
+        </p:txBody>
+      </p:sp>
+    </p:spTree>
+  </p:cSld>
+  <p:clrMapOvr>
+    <a:masterClrMapping/>
+  </p:clrMapOvr>
+</p:sld>
+</file>
+
+<file path=ppt/slides/slide13.xml><?xml version="1.0" encoding="utf-8"?>
+<p:sld xmlns:a="http://schemas.openxmlformats.org/drawingml/2006/main" xmlns:p="http://schemas.openxmlformats.org/presentationml/2006/main" xmlns:r="http://schemas.openxmlformats.org/officeDocument/2006/relationships">
+  <p:cSld>
+    <p:bg>
+      <p:bgPr>
+        <a:solidFill>
+          <a:srgbClr val="1F2A44"/>
+        </a:solidFill>
+        <a:effectLst/>
+      </p:bgPr>
+    </p:bg>
+    <p:spTree>
+      <p:nvGrpSpPr>
+        <p:cNvPr id="1" name=""/>
+        <p:cNvGrpSpPr/>
+        <p:nvPr/>
+      </p:nvGrpSpPr>
+      <p:grpSpPr/>
+      <p:sp>
+        <p:nvSpPr>
+          <p:cNvPr id="2" name="TextBox 1"/>
+          <p:cNvSpPr txBox="1"/>
+          <p:nvPr/>
+        </p:nvSpPr>
+        <p:spPr>
+          <a:xfrm>
+            <a:off x="640000" y="2300000"/>
+            <a:ext cx="10912000" cy="500000"/>
+          </a:xfrm>
+          <a:prstGeom prst="rect">
+            <a:avLst/>
+          </a:prstGeom>
+          <a:noFill/>
+        </p:spPr>
+        <p:txBody>
+          <a:bodyPr wrap="square">
+            <a:spAutoFit/>
+          </a:bodyPr>
+          <a:lstStyle/>
+          <a:p>
+            <a:pPr>
+              <a:spcAft>
+                <a:spcPts val="810"/>
+              </a:spcAft>
+            </a:pPr>
+            <a:r>
+              <a:rPr sz="1800" b="1">
+                <a:solidFill>
+                  <a:srgbClr val="F4B183"/>
+                </a:solidFill>
+                <a:latin typeface="Nunito Sans"/>
+              </a:rPr>
+              <a:t>BLOQUE 3</a:t>
+            </a:r>
+          </a:p>
+        </p:txBody>
+      </p:sp>
+      <p:sp>
+        <p:nvSpPr>
+          <p:cNvPr id="3" name="TextBox 2"/>
+          <p:cNvSpPr txBox="1"/>
+          <p:nvPr/>
+        </p:nvSpPr>
+        <p:spPr>
+          <a:xfrm>
+            <a:off x="640000" y="2800000"/>
+            <a:ext cx="10912000" cy="800000"/>
+          </a:xfrm>
+          <a:prstGeom prst="rect">
+            <a:avLst/>
+          </a:prstGeom>
+          <a:noFill/>
+        </p:spPr>
+        <p:txBody>
+          <a:bodyPr wrap="square">
+            <a:spAutoFit/>
+          </a:bodyPr>
+          <a:lstStyle/>
+          <a:p>
+            <a:pPr>
+              <a:spcAft>
+                <a:spcPts val="2160"/>
+              </a:spcAft>
+            </a:pPr>
+            <a:r>
+              <a:rPr sz="4800" b="1">
+                <a:solidFill>
+                  <a:srgbClr val="FBF7EF"/>
+                </a:solidFill>
+                <a:latin typeface="Fredoka"/>
+              </a:rPr>
+              <a:t>Error típico: la escalera</a:t>
+            </a:r>
+          </a:p>
+        </p:txBody>
+      </p:sp>
+    </p:spTree>
+  </p:cSld>
+  <p:clrMapOvr>
+    <a:masterClrMapping/>
+  </p:clrMapOvr>
+</p:sld>
+</file>
+
+<file path=ppt/slides/slide14.xml><?xml version="1.0" encoding="utf-8"?>
 <p:sld xmlns:a="http://schemas.openxmlformats.org/drawingml/2006/main" xmlns:p="http://schemas.openxmlformats.org/presentationml/2006/main" xmlns:r="http://schemas.openxmlformats.org/officeDocument/2006/relationships">
   <p:cSld>
     <p:bg>
@@ -4093,7 +4807,7 @@
                 </a:solidFill>
                 <a:latin typeface="Nunito Sans"/>
               </a:rPr>
-              <a:t>BLOQUE 2 · CASOS RESUELTOS</a:t>
+              <a:t>BLOQUE 3 · ERROR TÍPICO: LA ESCALERA</a:t>
             </a:r>
           </a:p>
         </p:txBody>
@@ -4132,7 +4846,7 @@
                 </a:solidFill>
                 <a:latin typeface="Fredoka"/>
               </a:rPr>
-              <a:t>Caso 2 · Por qué no se va</a:t>
+              <a:t>¿Escalera o mapa?</a:t>
             </a:r>
           </a:p>
         </p:txBody>
@@ -4145,14 +4859,14 @@
         </p:nvSpPr>
         <p:spPr>
           <a:xfrm>
-            <a:off x="640000" y="1600000"/>
-            <a:ext cx="10912000" cy="1100000"/>
+            <a:off x="640000" y="1650000"/>
+            <a:ext cx="5306000" cy="4400000"/>
           </a:xfrm>
           <a:prstGeom prst="rect">
             <a:avLst/>
           </a:prstGeom>
           <a:solidFill>
-            <a:srgbClr val="FFFFFF"/>
+            <a:srgbClr val="FBE3D2"/>
           </a:solidFill>
           <a:ln>
             <a:noFill/>
@@ -4188,8 +4902,8 @@
         </p:nvSpPr>
         <p:spPr>
           <a:xfrm>
-            <a:off x="840000" y="1650000"/>
-            <a:ext cx="10512000" cy="1000000"/>
+            <a:off x="840000" y="1750000"/>
+            <a:ext cx="4906000" cy="600000"/>
           </a:xfrm>
           <a:prstGeom prst="rect">
             <a:avLst/>
@@ -4197,7 +4911,46 @@
           <a:noFill/>
         </p:spPr>
         <p:txBody>
-          <a:bodyPr wrap="square" anchor="ctr">
+          <a:bodyPr wrap="square">
+            <a:spAutoFit/>
+          </a:bodyPr>
+          <a:lstStyle/>
+          <a:p>
+            <a:pPr>
+              <a:spcAft>
+                <a:spcPts val="1260"/>
+              </a:spcAft>
+            </a:pPr>
+            <a:r>
+              <a:rPr sz="2800" b="1">
+                <a:solidFill>
+                  <a:srgbClr val="C2531C"/>
+                </a:solidFill>
+                <a:latin typeface="Nunito Sans"/>
+              </a:rPr>
+              <a:t>Falso dilema (sesión 26)</a:t>
+            </a:r>
+          </a:p>
+        </p:txBody>
+      </p:sp>
+      <p:sp>
+        <p:nvSpPr>
+          <p:cNvPr id="6" name="TextBox 5"/>
+          <p:cNvSpPr txBox="1"/>
+          <p:nvPr/>
+        </p:nvSpPr>
+        <p:spPr>
+          <a:xfrm>
+            <a:off x="840000" y="2400000"/>
+            <a:ext cx="4906000" cy="3500000"/>
+          </a:xfrm>
+          <a:prstGeom prst="rect">
+            <a:avLst/>
+          </a:prstGeom>
+          <a:noFill/>
+        </p:spPr>
+        <p:txBody>
+          <a:bodyPr wrap="square">
             <a:spAutoFit/>
           </a:bodyPr>
           <a:lstStyle/>
@@ -4210,258 +4963,90 @@
             <a:r>
               <a:rPr sz="2600" b="1">
                 <a:solidFill>
+                  <a:srgbClr val="E8793A"/>
+                </a:solidFill>
+                <a:latin typeface="Nunito Sans"/>
+              </a:rPr>
+              <a:t>• </a:t>
+            </a:r>
+            <a:r>
+              <a:rPr sz="2600" b="0">
+                <a:solidFill>
                   <a:srgbClr val="1F2A44"/>
                 </a:solidFill>
                 <a:latin typeface="Nunito Sans"/>
               </a:rPr>
-              <a:t>Un chico cree que los de un barrio inventado son conflictivos. Si uno hace algo mal, lo recuerda durante meses. Los cien que no hacen nada malo, ni los ve.</a:t>
-            </a:r>
-          </a:p>
-        </p:txBody>
-      </p:sp>
-      <p:sp>
-        <p:nvSpPr>
-          <p:cNvPr id="6" name="TextBox 5"/>
-          <p:cNvSpPr txBox="1"/>
-          <p:nvPr/>
-        </p:nvSpPr>
-        <p:spPr>
-          <a:xfrm>
-            <a:off x="640000" y="2900000"/>
-            <a:ext cx="10912000" cy="3500000"/>
-          </a:xfrm>
-          <a:prstGeom prst="rect">
-            <a:avLst/>
-          </a:prstGeom>
-          <a:noFill/>
-        </p:spPr>
-        <p:txBody>
-          <a:bodyPr wrap="square">
-            <a:spAutoFit/>
-          </a:bodyPr>
-          <a:lstStyle/>
+              <a:t>«O universidad o fracaso»</a:t>
+            </a:r>
+          </a:p>
           <a:p>
             <a:pPr>
               <a:spcAft>
-                <a:spcPts val="1080"/>
+                <a:spcPts val="1170"/>
               </a:spcAft>
             </a:pPr>
             <a:r>
-              <a:rPr sz="2400" b="1">
+              <a:rPr sz="2600" b="1">
                 <a:solidFill>
                   <a:srgbClr val="E8793A"/>
                 </a:solidFill>
                 <a:latin typeface="Nunito Sans"/>
               </a:rPr>
-              <a:t>1. </a:t>
-            </a:r>
-            <a:r>
-              <a:rPr sz="2400" b="0">
+              <a:t>• </a:t>
+            </a:r>
+            <a:r>
+              <a:rPr sz="2600" b="0">
                 <a:solidFill>
                   <a:srgbClr val="1F2A44"/>
                 </a:solidFill>
                 <a:latin typeface="Nunito Sans"/>
               </a:rPr>
-              <a:t>Ese chico se fija solo en lo que confirma su idea: sesgo de confirmación (sesión 44).</a:t>
+              <a:t>«La FP es para los que no valen»</a:t>
             </a:r>
           </a:p>
           <a:p>
             <a:pPr>
               <a:spcAft>
-                <a:spcPts val="1080"/>
+                <a:spcPts val="1170"/>
               </a:spcAft>
             </a:pPr>
             <a:r>
-              <a:rPr sz="2400" b="1">
+              <a:rPr sz="2600" b="1">
                 <a:solidFill>
                   <a:srgbClr val="E8793A"/>
                 </a:solidFill>
                 <a:latin typeface="Nunito Sans"/>
               </a:rPr>
-              <a:t>2. </a:t>
-            </a:r>
-            <a:r>
-              <a:rPr sz="2400" b="0">
+              <a:t>• </a:t>
+            </a:r>
+            <a:r>
+              <a:rPr sz="2600" b="0">
                 <a:solidFill>
                   <a:srgbClr val="1F2A44"/>
                 </a:solidFill>
                 <a:latin typeface="Nunito Sans"/>
               </a:rPr>
-              <a:t>Además, ve a «los de ese barrio» como un bloque: nosotros y ellos (sesión 66).</a:t>
-            </a:r>
-          </a:p>
-          <a:p>
-            <a:pPr>
-              <a:spcAft>
-                <a:spcPts val="1080"/>
-              </a:spcAft>
-            </a:pPr>
-            <a:r>
-              <a:rPr sz="2400" b="1">
-                <a:solidFill>
-                  <a:srgbClr val="E8793A"/>
-                </a:solidFill>
-                <a:latin typeface="Nunito Sans"/>
-              </a:rPr>
-              <a:t>3. </a:t>
-            </a:r>
-            <a:r>
-              <a:rPr sz="2400" b="0">
-                <a:solidFill>
-                  <a:srgbClr val="1F2A44"/>
-                </a:solidFill>
-                <a:latin typeface="Nunito Sans"/>
-              </a:rPr>
-              <a:t>Así, cada caso nuevo parece darle la razón, y el prejuicio crece.</a:t>
-            </a:r>
-          </a:p>
-          <a:p>
-            <a:pPr>
-              <a:spcAft>
-                <a:spcPts val="1080"/>
-              </a:spcAft>
-            </a:pPr>
-            <a:r>
-              <a:rPr sz="2400" b="1">
-                <a:solidFill>
-                  <a:srgbClr val="E8793A"/>
-                </a:solidFill>
-                <a:latin typeface="Nunito Sans"/>
-              </a:rPr>
-              <a:t>4. </a:t>
-            </a:r>
-            <a:r>
-              <a:rPr sz="2400" b="0">
-                <a:solidFill>
-                  <a:srgbClr val="1F2A44"/>
-                </a:solidFill>
-                <a:latin typeface="Nunito Sans"/>
-              </a:rPr>
-              <a:t>Conclusión: el prejuicio se mantiene porque solo mira los casos que le convienen.</a:t>
-            </a:r>
-          </a:p>
-        </p:txBody>
-      </p:sp>
-    </p:spTree>
-  </p:cSld>
-  <p:clrMapOvr>
-    <a:masterClrMapping/>
-  </p:clrMapOvr>
-</p:sld>
-</file>
-
-<file path=ppt/slides/slide13.xml><?xml version="1.0" encoding="utf-8"?>
-<p:sld xmlns:a="http://schemas.openxmlformats.org/drawingml/2006/main" xmlns:p="http://schemas.openxmlformats.org/presentationml/2006/main" xmlns:r="http://schemas.openxmlformats.org/officeDocument/2006/relationships">
-  <p:cSld>
-    <p:bg>
-      <p:bgPr>
-        <a:solidFill>
-          <a:srgbClr val="F6C9A8"/>
-        </a:solidFill>
-        <a:effectLst/>
-      </p:bgPr>
-    </p:bg>
-    <p:spTree>
-      <p:nvGrpSpPr>
-        <p:cNvPr id="1" name=""/>
-        <p:cNvGrpSpPr/>
-        <p:nvPr/>
-      </p:nvGrpSpPr>
-      <p:grpSpPr/>
-      <p:sp>
-        <p:nvSpPr>
-          <p:cNvPr id="2" name="TextBox 1"/>
-          <p:cNvSpPr txBox="1"/>
-          <p:nvPr/>
-        </p:nvSpPr>
-        <p:spPr>
-          <a:xfrm>
-            <a:off x="640000" y="380000"/>
-            <a:ext cx="10912000" cy="420000"/>
-          </a:xfrm>
-          <a:prstGeom prst="rect">
-            <a:avLst/>
-          </a:prstGeom>
-          <a:noFill/>
-        </p:spPr>
-        <p:txBody>
-          <a:bodyPr wrap="square">
-            <a:spAutoFit/>
-          </a:bodyPr>
-          <a:lstStyle/>
-          <a:p>
-            <a:pPr>
-              <a:spcAft>
-                <a:spcPts val="630"/>
-              </a:spcAft>
-            </a:pPr>
-            <a:r>
-              <a:rPr sz="1400" b="1">
-                <a:solidFill>
-                  <a:srgbClr val="1F2A44"/>
-                </a:solidFill>
-                <a:latin typeface="Nunito Sans"/>
-              </a:rPr>
-              <a:t>CASO TRAMPA · BLOQUE 2 · CASOS RESUELTOS</a:t>
-            </a:r>
-          </a:p>
-        </p:txBody>
-      </p:sp>
-      <p:sp>
-        <p:nvSpPr>
-          <p:cNvPr id="3" name="TextBox 2"/>
-          <p:cNvSpPr txBox="1"/>
-          <p:nvPr/>
-        </p:nvSpPr>
-        <p:spPr>
-          <a:xfrm>
-            <a:off x="640000" y="760000"/>
-            <a:ext cx="10912000" cy="800000"/>
-          </a:xfrm>
-          <a:prstGeom prst="rect">
-            <a:avLst/>
-          </a:prstGeom>
-          <a:noFill/>
-        </p:spPr>
-        <p:txBody>
-          <a:bodyPr wrap="square">
-            <a:spAutoFit/>
-          </a:bodyPr>
-          <a:lstStyle/>
-          <a:p>
-            <a:pPr>
-              <a:spcAft>
-                <a:spcPts val="1710"/>
-              </a:spcAft>
-            </a:pPr>
-            <a:r>
-              <a:rPr sz="3800" b="1">
-                <a:solidFill>
-                  <a:srgbClr val="1F2A44"/>
-                </a:solidFill>
-                <a:latin typeface="Fredoka"/>
-              </a:rPr>
-              <a:t>⚠ «Solo era una broma»</a:t>
-            </a:r>
-          </a:p>
-        </p:txBody>
-      </p:sp>
-      <p:sp>
-        <p:nvSpPr>
-          <p:cNvPr id="4" name="Rectangle 3"/>
+              <a:t>«Si eliges mal, ya no hay vuelta atrás»</a:t>
+            </a:r>
+          </a:p>
+        </p:txBody>
+      </p:sp>
+      <p:sp>
+        <p:nvSpPr>
+          <p:cNvPr id="7" name="Rectangle 6"/>
           <p:cNvSpPr/>
           <p:nvPr/>
         </p:nvSpPr>
         <p:spPr>
           <a:xfrm>
-            <a:off x="640000" y="1600000"/>
-            <a:ext cx="10912000" cy="1100000"/>
+            <a:off x="6246000" y="1650000"/>
+            <a:ext cx="5306000" cy="4400000"/>
           </a:xfrm>
           <a:prstGeom prst="rect">
             <a:avLst/>
           </a:prstGeom>
           <a:solidFill>
-            <a:srgbClr val="FBF7EF"/>
+            <a:srgbClr val="EAF0F7"/>
           </a:solidFill>
           <a:ln>
             <a:noFill/>
@@ -4491,14 +5076,14 @@
       </p:sp>
       <p:sp>
         <p:nvSpPr>
-          <p:cNvPr id="5" name="TextBox 4"/>
+          <p:cNvPr id="8" name="TextBox 7"/>
           <p:cNvSpPr txBox="1"/>
           <p:nvPr/>
         </p:nvSpPr>
         <p:spPr>
           <a:xfrm>
-            <a:off x="840000" y="1650000"/>
-            <a:ext cx="10512000" cy="1000000"/>
+            <a:off x="6446000" y="1750000"/>
+            <a:ext cx="4906000" cy="600000"/>
           </a:xfrm>
           <a:prstGeom prst="rect">
             <a:avLst/>
@@ -4506,7 +5091,46 @@
           <a:noFill/>
         </p:spPr>
         <p:txBody>
-          <a:bodyPr wrap="square" anchor="ctr">
+          <a:bodyPr wrap="square">
+            <a:spAutoFit/>
+          </a:bodyPr>
+          <a:lstStyle/>
+          <a:p>
+            <a:pPr>
+              <a:spcAft>
+                <a:spcPts val="1260"/>
+              </a:spcAft>
+            </a:pPr>
+            <a:r>
+              <a:rPr sz="2800" b="1">
+                <a:solidFill>
+                  <a:srgbClr val="2F6FB5"/>
+                </a:solidFill>
+                <a:latin typeface="Nunito Sans"/>
+              </a:rPr>
+              <a:t>Mejor así</a:t>
+            </a:r>
+          </a:p>
+        </p:txBody>
+      </p:sp>
+      <p:sp>
+        <p:nvSpPr>
+          <p:cNvPr id="9" name="TextBox 8"/>
+          <p:cNvSpPr txBox="1"/>
+          <p:nvPr/>
+        </p:nvSpPr>
+        <p:spPr>
+          <a:xfrm>
+            <a:off x="6446000" y="2400000"/>
+            <a:ext cx="4906000" cy="3500000"/>
+          </a:xfrm>
+          <a:prstGeom prst="rect">
+            <a:avLst/>
+          </a:prstGeom>
+          <a:noFill/>
+        </p:spPr>
+        <p:txBody>
+          <a:bodyPr wrap="square">
             <a:spAutoFit/>
           </a:bodyPr>
           <a:lstStyle/>
@@ -4519,263 +5143,104 @@
             <a:r>
               <a:rPr sz="2600" b="1">
                 <a:solidFill>
+                  <a:srgbClr val="E8793A"/>
+                </a:solidFill>
+                <a:latin typeface="Nunito Sans"/>
+              </a:rPr>
+              <a:t>• </a:t>
+            </a:r>
+            <a:r>
+              <a:rPr sz="2600" b="0">
+                <a:solidFill>
                   <a:srgbClr val="1F2A44"/>
                 </a:solidFill>
                 <a:latin typeface="Nunito Sans"/>
               </a:rPr>
-              <a:t>En el vestuario, un chico suelta «Eso es de gais» cada vez que algo no le gusta. Cuando se lo dicen, contesta: «Solo es una broma. No tengo nada contra nadie».</a:t>
-            </a:r>
-          </a:p>
-        </p:txBody>
-      </p:sp>
-      <p:sp>
-        <p:nvSpPr>
-          <p:cNvPr id="6" name="TextBox 5"/>
-          <p:cNvSpPr txBox="1"/>
-          <p:nvPr/>
-        </p:nvSpPr>
-        <p:spPr>
-          <a:xfrm>
-            <a:off x="640000" y="2900000"/>
-            <a:ext cx="10912000" cy="3500000"/>
-          </a:xfrm>
-          <a:prstGeom prst="rect">
-            <a:avLst/>
-          </a:prstGeom>
-          <a:noFill/>
-        </p:spPr>
-        <p:txBody>
-          <a:bodyPr wrap="square">
-            <a:spAutoFit/>
-          </a:bodyPr>
-          <a:lstStyle/>
+              <a:t>Hay varios caminos, y </a:t>
+            </a:r>
+            <a:r>
+              <a:rPr sz="2600" b="1">
+                <a:solidFill>
+                  <a:srgbClr val="1F2A44"/>
+                </a:solidFill>
+                <a:latin typeface="Nunito Sans"/>
+              </a:rPr>
+              <a:t>se cruzan</a:t>
+            </a:r>
+          </a:p>
           <a:p>
             <a:pPr>
               <a:spcAft>
-                <a:spcPts val="1080"/>
+                <a:spcPts val="1170"/>
               </a:spcAft>
             </a:pPr>
             <a:r>
-              <a:rPr sz="2400" b="1">
+              <a:rPr sz="2600" b="1">
                 <a:solidFill>
                   <a:srgbClr val="E8793A"/>
                 </a:solidFill>
                 <a:latin typeface="Nunito Sans"/>
               </a:rPr>
-              <a:t>1. </a:t>
-            </a:r>
-            <a:r>
-              <a:rPr sz="2400" b="0">
+              <a:t>• </a:t>
+            </a:r>
+            <a:r>
+              <a:rPr sz="2600" b="0">
                 <a:solidFill>
                   <a:srgbClr val="1F2A44"/>
                 </a:solidFill>
                 <a:latin typeface="Nunito Sans"/>
               </a:rPr>
-              <a:t>Ese chico no quiere hacer daño. ¿Entonces no pasa nada?</a:t>
+              <a:t>La FP forma profesionales; desde grado superior se llega a la universidad</a:t>
             </a:r>
           </a:p>
           <a:p>
             <a:pPr>
               <a:spcAft>
-                <a:spcPts val="1080"/>
+                <a:spcPts val="1170"/>
               </a:spcAft>
             </a:pPr>
             <a:r>
-              <a:rPr sz="2400" b="1">
+              <a:rPr sz="2600" b="1">
                 <a:solidFill>
                   <a:srgbClr val="E8793A"/>
                 </a:solidFill>
                 <a:latin typeface="Nunito Sans"/>
               </a:rPr>
-              <a:t>2. </a:t>
-            </a:r>
-            <a:r>
-              <a:rPr sz="2400" b="0">
+              <a:t>• </a:t>
+            </a:r>
+            <a:r>
+              <a:rPr sz="2600" b="0">
                 <a:solidFill>
                   <a:srgbClr val="1F2A44"/>
                 </a:solidFill>
                 <a:latin typeface="Nunito Sans"/>
               </a:rPr>
-              <a:t>Parece que no: no odia a nadie y lo dice riéndose.</a:t>
+              <a:t>Se puede cambiar: de FP a Bachillerato y al revés</a:t>
             </a:r>
           </a:p>
           <a:p>
             <a:pPr>
               <a:spcAft>
-                <a:spcPts val="1080"/>
+                <a:spcPts val="1170"/>
               </a:spcAft>
             </a:pPr>
             <a:r>
-              <a:rPr sz="2400" b="1">
+              <a:rPr sz="2600" b="1">
                 <a:solidFill>
                   <a:srgbClr val="E8793A"/>
                 </a:solidFill>
                 <a:latin typeface="Nunito Sans"/>
               </a:rPr>
-              <a:t>3. </a:t>
-            </a:r>
-            <a:r>
-              <a:rPr sz="2400" b="0">
+              <a:t>• </a:t>
+            </a:r>
+            <a:r>
+              <a:rPr sz="2600" b="0">
                 <a:solidFill>
                   <a:srgbClr val="1F2A44"/>
                 </a:solidFill>
                 <a:latin typeface="Nunito Sans"/>
               </a:rPr>
-              <a:t>Pero usa «gay» como algo malo, como un insulto.</a:t>
-            </a:r>
-          </a:p>
-          <a:p>
-            <a:pPr>
-              <a:spcAft>
-                <a:spcPts val="1080"/>
-              </a:spcAft>
-            </a:pPr>
-            <a:r>
-              <a:rPr sz="2400" b="1">
-                <a:solidFill>
-                  <a:srgbClr val="E8793A"/>
-                </a:solidFill>
-                <a:latin typeface="Nunito Sans"/>
-              </a:rPr>
-              <a:t>4. </a:t>
-            </a:r>
-            <a:r>
-              <a:rPr sz="2400" b="0">
-                <a:solidFill>
-                  <a:srgbClr val="1F2A44"/>
-                </a:solidFill>
-                <a:latin typeface="Nunito Sans"/>
-              </a:rPr>
-              <a:t>El mensaje llega igual: quien es gay oye que ser como él es algo negativo.</a:t>
-            </a:r>
-          </a:p>
-          <a:p>
-            <a:pPr>
-              <a:spcAft>
-                <a:spcPts val="1080"/>
-              </a:spcAft>
-            </a:pPr>
-            <a:r>
-              <a:rPr sz="2400" b="1">
-                <a:solidFill>
-                  <a:srgbClr val="E8793A"/>
-                </a:solidFill>
-                <a:latin typeface="Nunito Sans"/>
-              </a:rPr>
-              <a:t>5. </a:t>
-            </a:r>
-            <a:r>
-              <a:rPr sz="2400" b="0">
-                <a:solidFill>
-                  <a:srgbClr val="1F2A44"/>
-                </a:solidFill>
-                <a:latin typeface="Nunito Sans"/>
-              </a:rPr>
-              <a:t>Conclusión: sin querer, la broma trata una orientación como insulto. Es un trato homófobo, aunque no haya odio.</a:t>
-            </a:r>
-          </a:p>
-        </p:txBody>
-      </p:sp>
-    </p:spTree>
-  </p:cSld>
-  <p:clrMapOvr>
-    <a:masterClrMapping/>
-  </p:clrMapOvr>
-</p:sld>
-</file>
-
-<file path=ppt/slides/slide14.xml><?xml version="1.0" encoding="utf-8"?>
-<p:sld xmlns:a="http://schemas.openxmlformats.org/drawingml/2006/main" xmlns:p="http://schemas.openxmlformats.org/presentationml/2006/main" xmlns:r="http://schemas.openxmlformats.org/officeDocument/2006/relationships">
-  <p:cSld>
-    <p:bg>
-      <p:bgPr>
-        <a:solidFill>
-          <a:srgbClr val="1F2A44"/>
-        </a:solidFill>
-        <a:effectLst/>
-      </p:bgPr>
-    </p:bg>
-    <p:spTree>
-      <p:nvGrpSpPr>
-        <p:cNvPr id="1" name=""/>
-        <p:cNvGrpSpPr/>
-        <p:nvPr/>
-      </p:nvGrpSpPr>
-      <p:grpSpPr/>
-      <p:sp>
-        <p:nvSpPr>
-          <p:cNvPr id="2" name="TextBox 1"/>
-          <p:cNvSpPr txBox="1"/>
-          <p:nvPr/>
-        </p:nvSpPr>
-        <p:spPr>
-          <a:xfrm>
-            <a:off x="640000" y="2300000"/>
-            <a:ext cx="10912000" cy="500000"/>
-          </a:xfrm>
-          <a:prstGeom prst="rect">
-            <a:avLst/>
-          </a:prstGeom>
-          <a:noFill/>
-        </p:spPr>
-        <p:txBody>
-          <a:bodyPr wrap="square">
-            <a:spAutoFit/>
-          </a:bodyPr>
-          <a:lstStyle/>
-          <a:p>
-            <a:pPr>
-              <a:spcAft>
-                <a:spcPts val="810"/>
-              </a:spcAft>
-            </a:pPr>
-            <a:r>
-              <a:rPr sz="1800" b="1">
-                <a:solidFill>
-                  <a:srgbClr val="F4B183"/>
-                </a:solidFill>
-                <a:latin typeface="Nunito Sans"/>
-              </a:rPr>
-              <a:t>BLOQUE 3</a:t>
-            </a:r>
-          </a:p>
-        </p:txBody>
-      </p:sp>
-      <p:sp>
-        <p:nvSpPr>
-          <p:cNvPr id="3" name="TextBox 2"/>
-          <p:cNvSpPr txBox="1"/>
-          <p:nvPr/>
-        </p:nvSpPr>
-        <p:spPr>
-          <a:xfrm>
-            <a:off x="640000" y="2800000"/>
-            <a:ext cx="10912000" cy="800000"/>
-          </a:xfrm>
-          <a:prstGeom prst="rect">
-            <a:avLst/>
-          </a:prstGeom>
-          <a:noFill/>
-        </p:spPr>
-        <p:txBody>
-          <a:bodyPr wrap="square">
-            <a:spAutoFit/>
-          </a:bodyPr>
-          <a:lstStyle/>
-          <a:p>
-            <a:pPr>
-              <a:spcAft>
-                <a:spcPts val="2160"/>
-              </a:spcAft>
-            </a:pPr>
-            <a:r>
-              <a:rPr sz="4800" b="1">
-                <a:solidFill>
-                  <a:srgbClr val="FBF7EF"/>
-                </a:solidFill>
-                <a:latin typeface="Fredoka"/>
-              </a:rPr>
-              <a:t>Frenar un prejuicio</a:t>
+              <a:t>Cada camino vale según tus razones</a:t>
             </a:r>
           </a:p>
         </p:txBody>
@@ -4840,7 +5305,7 @@
                 </a:solidFill>
                 <a:latin typeface="Nunito Sans"/>
               </a:rPr>
-              <a:t>BLOQUE 3 · FRENAR UN PREJUICIO</a:t>
+              <a:t>LO DE HOY EN TRES LÍNEAS</a:t>
             </a:r>
           </a:p>
         </p:txBody>
@@ -4879,7 +5344,7 @@
                 </a:solidFill>
                 <a:latin typeface="Fredoka"/>
               </a:rPr>
-              <a:t>Cuatro preguntas contra un prejuicio</a:t>
+              <a:t>Escríbelo tú primero, sin mirar</a:t>
             </a:r>
           </a:p>
         </p:txBody>
@@ -4892,8 +5357,8 @@
         </p:nvSpPr>
         <p:spPr>
           <a:xfrm>
-            <a:off x="640000" y="1650000"/>
-            <a:ext cx="10912000" cy="4808000"/>
+            <a:off x="640000" y="1800000"/>
+            <a:ext cx="10912000" cy="1500000"/>
           </a:xfrm>
           <a:prstGeom prst="rect">
             <a:avLst/>
@@ -4908,128 +5373,17 @@
           <a:p>
             <a:pPr>
               <a:spcAft>
-                <a:spcPts val="1260"/>
+                <a:spcPts val="1170"/>
               </a:spcAft>
             </a:pPr>
             <a:r>
-              <a:rPr sz="2800" b="1">
-                <a:solidFill>
-                  <a:srgbClr val="E8793A"/>
-                </a:solidFill>
-                <a:latin typeface="Nunito Sans"/>
-              </a:rPr>
-              <a:t>• </a:t>
-            </a:r>
-            <a:r>
-              <a:rPr sz="2800" b="1">
-                <a:solidFill>
-                  <a:srgbClr val="1F2A44"/>
-                </a:solidFill>
-                <a:latin typeface="Nunito Sans"/>
-              </a:rPr>
-              <a:t>¿Cómo lo sabes?</a:t>
-            </a:r>
-            <a:r>
-              <a:rPr sz="2800" b="0">
-                <a:solidFill>
-                  <a:srgbClr val="1F2A44"/>
-                </a:solidFill>
-                <a:latin typeface="Nunito Sans"/>
-              </a:rPr>
-              <a:t> ¿Lo has comprobado o lo has oído?</a:t>
-            </a:r>
-          </a:p>
-          <a:p>
-            <a:pPr>
-              <a:spcAft>
-                <a:spcPts val="1260"/>
-              </a:spcAft>
-            </a:pPr>
-            <a:r>
-              <a:rPr sz="2800" b="1">
-                <a:solidFill>
-                  <a:srgbClr val="E8793A"/>
-                </a:solidFill>
-                <a:latin typeface="Nunito Sans"/>
-              </a:rPr>
-              <a:t>• </a:t>
-            </a:r>
-            <a:r>
-              <a:rPr sz="2800" b="1">
-                <a:solidFill>
-                  <a:srgbClr val="1F2A44"/>
-                </a:solidFill>
-                <a:latin typeface="Nunito Sans"/>
-              </a:rPr>
-              <a:t>¿Cuántos casos has mirado?</a:t>
-            </a:r>
-            <a:r>
-              <a:rPr sz="2800" b="0">
-                <a:solidFill>
-                  <a:srgbClr val="1F2A44"/>
-                </a:solidFill>
-                <a:latin typeface="Nunito Sans"/>
-              </a:rPr>
-              <a:t> Uno no basta (sesión 19).</a:t>
-            </a:r>
-          </a:p>
-          <a:p>
-            <a:pPr>
-              <a:spcAft>
-                <a:spcPts val="1260"/>
-              </a:spcAft>
-            </a:pPr>
-            <a:r>
-              <a:rPr sz="2800" b="1">
-                <a:solidFill>
-                  <a:srgbClr val="E8793A"/>
-                </a:solidFill>
-                <a:latin typeface="Nunito Sans"/>
-              </a:rPr>
-              <a:t>• </a:t>
-            </a:r>
-            <a:r>
-              <a:rPr sz="2800" b="1">
-                <a:solidFill>
-                  <a:srgbClr val="1F2A44"/>
-                </a:solidFill>
-                <a:latin typeface="Nunito Sans"/>
-              </a:rPr>
-              <a:t>¿Busco solo lo que me da la razón?</a:t>
-            </a:r>
-            <a:r>
-              <a:rPr sz="2800" b="0">
-                <a:solidFill>
-                  <a:srgbClr val="1F2A44"/>
-                </a:solidFill>
-                <a:latin typeface="Nunito Sans"/>
-              </a:rPr>
-              <a:t> (sesión 44).</a:t>
-            </a:r>
-          </a:p>
-          <a:p>
-            <a:pPr>
-              <a:spcAft>
-                <a:spcPts val="1260"/>
-              </a:spcAft>
-            </a:pPr>
-            <a:r>
-              <a:rPr sz="2800" b="1">
-                <a:solidFill>
-                  <a:srgbClr val="E8793A"/>
-                </a:solidFill>
-                <a:latin typeface="Nunito Sans"/>
-              </a:rPr>
-              <a:t>• </a:t>
-            </a:r>
-            <a:r>
-              <a:rPr sz="2800" b="1">
-                <a:solidFill>
-                  <a:srgbClr val="1F2A44"/>
-                </a:solidFill>
-                <a:latin typeface="Nunito Sans"/>
-              </a:rPr>
-              <a:t>¿Veo a la persona o solo su grupo?</a:t>
+              <a:rPr sz="2600" b="0">
+                <a:solidFill>
+                  <a:srgbClr val="4A5568"/>
+                </a:solidFill>
+                <a:latin typeface="Nunito Sans"/>
+              </a:rPr>
+              <a:t>Dos minutos. Después lo comparamos.</a:t>
             </a:r>
           </a:p>
         </p:txBody>
@@ -5107,8 +5461,8 @@
         </p:nvSpPr>
         <p:spPr>
           <a:xfrm>
-            <a:off x="640000" y="760000"/>
-            <a:ext cx="10912000" cy="800000"/>
+            <a:off x="640000" y="1300000"/>
+            <a:ext cx="10912000" cy="4800000"/>
           </a:xfrm>
           <a:prstGeom prst="rect">
             <a:avLst/>
@@ -5123,56 +5477,76 @@
           <a:p>
             <a:pPr>
               <a:spcAft>
-                <a:spcPts val="1710"/>
+                <a:spcPts val="1350"/>
               </a:spcAft>
             </a:pPr>
             <a:r>
-              <a:rPr sz="3800" b="1">
+              <a:rPr sz="3000" b="1">
+                <a:solidFill>
+                  <a:srgbClr val="E8793A"/>
+                </a:solidFill>
+                <a:latin typeface="Nunito Sans"/>
+              </a:rPr>
+              <a:t>1. </a:t>
+            </a:r>
+            <a:r>
+              <a:rPr sz="3000" b="0">
                 <a:solidFill>
                   <a:srgbClr val="1F2A44"/>
                 </a:solidFill>
-                <a:latin typeface="Fredoka"/>
-              </a:rPr>
-              <a:t>Escríbelo tú primero, sin mirar</a:t>
-            </a:r>
-          </a:p>
-        </p:txBody>
-      </p:sp>
-      <p:sp>
-        <p:nvSpPr>
-          <p:cNvPr id="4" name="TextBox 3"/>
-          <p:cNvSpPr txBox="1"/>
-          <p:nvPr/>
-        </p:nvSpPr>
-        <p:spPr>
-          <a:xfrm>
-            <a:off x="640000" y="1800000"/>
-            <a:ext cx="10912000" cy="1500000"/>
-          </a:xfrm>
-          <a:prstGeom prst="rect">
-            <a:avLst/>
-          </a:prstGeom>
-          <a:noFill/>
-        </p:spPr>
-        <p:txBody>
-          <a:bodyPr wrap="square">
-            <a:spAutoFit/>
-          </a:bodyPr>
-          <a:lstStyle/>
+                <a:latin typeface="Nunito Sans"/>
+              </a:rPr>
+              <a:t>Con el título de la ESO puedes ir a Bachillerato o a FP de grado medio.</a:t>
+            </a:r>
+          </a:p>
           <a:p>
             <a:pPr>
               <a:spcAft>
-                <a:spcPts val="1170"/>
+                <a:spcPts val="1350"/>
               </a:spcAft>
             </a:pPr>
             <a:r>
-              <a:rPr sz="2600" b="0">
-                <a:solidFill>
-                  <a:srgbClr val="4A5568"/>
-                </a:solidFill>
-                <a:latin typeface="Nunito Sans"/>
-              </a:rPr>
-              <a:t>Dos minutos. Después lo comparamos.</a:t>
+              <a:rPr sz="3000" b="1">
+                <a:solidFill>
+                  <a:srgbClr val="E8793A"/>
+                </a:solidFill>
+                <a:latin typeface="Nunito Sans"/>
+              </a:rPr>
+              <a:t>2. </a:t>
+            </a:r>
+            <a:r>
+              <a:rPr sz="3000" b="0">
+                <a:solidFill>
+                  <a:srgbClr val="1F2A44"/>
+                </a:solidFill>
+                <a:latin typeface="Nunito Sans"/>
+              </a:rPr>
+              <a:t>Los caminos se cruzan: la FP no es un camino peor, es otro camino.</a:t>
+            </a:r>
+          </a:p>
+          <a:p>
+            <a:pPr>
+              <a:spcAft>
+                <a:spcPts val="1350"/>
+              </a:spcAft>
+            </a:pPr>
+            <a:r>
+              <a:rPr sz="3000" b="1">
+                <a:solidFill>
+                  <a:srgbClr val="E8793A"/>
+                </a:solidFill>
+                <a:latin typeface="Nunito Sans"/>
+              </a:rPr>
+              <a:t>3. </a:t>
+            </a:r>
+            <a:r>
+              <a:rPr sz="3000" b="0">
+                <a:solidFill>
+                  <a:srgbClr val="1F2A44"/>
+                </a:solidFill>
+                <a:latin typeface="Nunito Sans"/>
+              </a:rPr>
+              <a:t>Elige con razones propias e información; el alumnado tiene derechos y también deberes.</a:t>
             </a:r>
           </a:p>
         </p:txBody>
@@ -5191,7 +5565,7 @@
     <p:bg>
       <p:bgPr>
         <a:solidFill>
-          <a:srgbClr val="FBF7EF"/>
+          <a:srgbClr val="1F2A44"/>
         </a:solidFill>
         <a:effectLst/>
       </p:bgPr>
@@ -5233,11 +5607,11 @@
             <a:r>
               <a:rPr sz="1400" b="1">
                 <a:solidFill>
-                  <a:srgbClr val="E8793A"/>
-                </a:solidFill>
-                <a:latin typeface="Nunito Sans"/>
-              </a:rPr>
-              <a:t>LO DE HOY EN TRES LÍNEAS</a:t>
+                  <a:srgbClr val="F4B183"/>
+                </a:solidFill>
+                <a:latin typeface="Nunito Sans"/>
+              </a:rPr>
+              <a:t>VÍDEO</a:t>
             </a:r>
           </a:p>
         </p:txBody>
@@ -5250,8 +5624,8 @@
         </p:nvSpPr>
         <p:spPr>
           <a:xfrm>
-            <a:off x="640000" y="1300000"/>
-            <a:ext cx="10912000" cy="4800000"/>
+            <a:off x="640000" y="760000"/>
+            <a:ext cx="10912000" cy="800000"/>
           </a:xfrm>
           <a:prstGeom prst="rect">
             <a:avLst/>
@@ -5266,76 +5640,56 @@
           <a:p>
             <a:pPr>
               <a:spcAft>
-                <a:spcPts val="1350"/>
+                <a:spcPts val="1620"/>
               </a:spcAft>
             </a:pPr>
             <a:r>
-              <a:rPr sz="3000" b="1">
-                <a:solidFill>
-                  <a:srgbClr val="E8793A"/>
-                </a:solidFill>
-                <a:latin typeface="Nunito Sans"/>
-              </a:rPr>
-              <a:t>1. </a:t>
-            </a:r>
-            <a:r>
-              <a:rPr sz="3000" b="0">
-                <a:solidFill>
-                  <a:srgbClr val="1F2A44"/>
-                </a:solidFill>
-                <a:latin typeface="Nunito Sans"/>
-              </a:rPr>
-              <a:t>Un prejuicio es juzgar a alguien antes de conocerle, solo por su grupo.</a:t>
-            </a:r>
-          </a:p>
+              <a:rPr sz="3600" b="1">
+                <a:solidFill>
+                  <a:srgbClr val="FBF7EF"/>
+                </a:solidFill>
+                <a:latin typeface="Fredoka"/>
+              </a:rPr>
+              <a:t>Qué opciones hay después de la ESO: Bachillerato y Formación Profesional en Euskadi</a:t>
+            </a:r>
+          </a:p>
+        </p:txBody>
+      </p:sp>
+      <p:sp>
+        <p:nvSpPr>
+          <p:cNvPr id="4" name="TextBox 3"/>
+          <p:cNvSpPr txBox="1"/>
+          <p:nvPr/>
+        </p:nvSpPr>
+        <p:spPr>
+          <a:xfrm>
+            <a:off x="640000" y="2200000"/>
+            <a:ext cx="10912000" cy="2000000"/>
+          </a:xfrm>
+          <a:prstGeom prst="rect">
+            <a:avLst/>
+          </a:prstGeom>
+          <a:noFill/>
+        </p:spPr>
+        <p:txBody>
+          <a:bodyPr wrap="square">
+            <a:spAutoFit/>
+          </a:bodyPr>
+          <a:lstStyle/>
           <a:p>
             <a:pPr>
               <a:spcAft>
-                <a:spcPts val="1350"/>
+                <a:spcPts val="1080"/>
               </a:spcAft>
             </a:pPr>
             <a:r>
-              <a:rPr sz="3000" b="1">
-                <a:solidFill>
-                  <a:srgbClr val="E8793A"/>
-                </a:solidFill>
-                <a:latin typeface="Nunito Sans"/>
-              </a:rPr>
-              <a:t>2. </a:t>
-            </a:r>
-            <a:r>
-              <a:rPr sz="3000" b="0">
-                <a:solidFill>
-                  <a:srgbClr val="1F2A44"/>
-                </a:solidFill>
-                <a:latin typeface="Nunito Sans"/>
-              </a:rPr>
-              <a:t>La aporofobia es el rechazo al pobre; Adela Cortina creó la palabra.</a:t>
-            </a:r>
-          </a:p>
-          <a:p>
-            <a:pPr>
-              <a:spcAft>
-                <a:spcPts val="1350"/>
-              </a:spcAft>
-            </a:pPr>
-            <a:r>
-              <a:rPr sz="3000" b="1">
-                <a:solidFill>
-                  <a:srgbClr val="E8793A"/>
-                </a:solidFill>
-                <a:latin typeface="Nunito Sans"/>
-              </a:rPr>
-              <a:t>3. </a:t>
-            </a:r>
-            <a:r>
-              <a:rPr sz="3000" b="0">
-                <a:solidFill>
-                  <a:srgbClr val="1F2A44"/>
-                </a:solidFill>
-                <a:latin typeface="Nunito Sans"/>
-              </a:rPr>
-              <a:t>El sesgo de confirmación mantiene los prejuicios: mira solo los casos que convienen.</a:t>
+              <a:rPr sz="2400" b="0">
+                <a:solidFill>
+                  <a:srgbClr val="C9D3E6"/>
+                </a:solidFill>
+                <a:latin typeface="Nunito Sans"/>
+              </a:rPr>
+              <a:t>Ver el mapa de caminos y comprobar que no es una escalera: los caminos se cruzan.</a:t>
             </a:r>
           </a:p>
         </p:txBody>
@@ -5400,149 +5754,6 @@
                 </a:solidFill>
                 <a:latin typeface="Nunito Sans"/>
               </a:rPr>
-              <a:t>VÍDEO</a:t>
-            </a:r>
-          </a:p>
-        </p:txBody>
-      </p:sp>
-      <p:sp>
-        <p:nvSpPr>
-          <p:cNvPr id="3" name="TextBox 2"/>
-          <p:cNvSpPr txBox="1"/>
-          <p:nvPr/>
-        </p:nvSpPr>
-        <p:spPr>
-          <a:xfrm>
-            <a:off x="640000" y="760000"/>
-            <a:ext cx="10912000" cy="800000"/>
-          </a:xfrm>
-          <a:prstGeom prst="rect">
-            <a:avLst/>
-          </a:prstGeom>
-          <a:noFill/>
-        </p:spPr>
-        <p:txBody>
-          <a:bodyPr wrap="square">
-            <a:spAutoFit/>
-          </a:bodyPr>
-          <a:lstStyle/>
-          <a:p>
-            <a:pPr>
-              <a:spcAft>
-                <a:spcPts val="1620"/>
-              </a:spcAft>
-            </a:pPr>
-            <a:r>
-              <a:rPr sz="3600" b="1">
-                <a:solidFill>
-                  <a:srgbClr val="FBF7EF"/>
-                </a:solidFill>
-                <a:latin typeface="Fredoka"/>
-              </a:rPr>
-              <a:t>Adela Cortina explica la aporofobia, el rechazo al pobre</a:t>
-            </a:r>
-          </a:p>
-        </p:txBody>
-      </p:sp>
-      <p:sp>
-        <p:nvSpPr>
-          <p:cNvPr id="4" name="TextBox 3"/>
-          <p:cNvSpPr txBox="1"/>
-          <p:nvPr/>
-        </p:nvSpPr>
-        <p:spPr>
-          <a:xfrm>
-            <a:off x="640000" y="2200000"/>
-            <a:ext cx="10912000" cy="2000000"/>
-          </a:xfrm>
-          <a:prstGeom prst="rect">
-            <a:avLst/>
-          </a:prstGeom>
-          <a:noFill/>
-        </p:spPr>
-        <p:txBody>
-          <a:bodyPr wrap="square">
-            <a:spAutoFit/>
-          </a:bodyPr>
-          <a:lstStyle/>
-          <a:p>
-            <a:pPr>
-              <a:spcAft>
-                <a:spcPts val="1080"/>
-              </a:spcAft>
-            </a:pPr>
-            <a:r>
-              <a:rPr sz="2400" b="0">
-                <a:solidFill>
-                  <a:srgbClr val="C9D3E6"/>
-                </a:solidFill>
-                <a:latin typeface="Nunito Sans"/>
-              </a:rPr>
-              <a:t>Que oigan a la autora explicar con sus palabras por qué el rechazo va, muchas veces, contra el pobre.</a:t>
-            </a:r>
-          </a:p>
-        </p:txBody>
-      </p:sp>
-    </p:spTree>
-  </p:cSld>
-  <p:clrMapOvr>
-    <a:masterClrMapping/>
-  </p:clrMapOvr>
-</p:sld>
-</file>
-
-<file path=ppt/slides/slide19.xml><?xml version="1.0" encoding="utf-8"?>
-<p:sld xmlns:a="http://schemas.openxmlformats.org/drawingml/2006/main" xmlns:p="http://schemas.openxmlformats.org/presentationml/2006/main" xmlns:r="http://schemas.openxmlformats.org/officeDocument/2006/relationships">
-  <p:cSld>
-    <p:bg>
-      <p:bgPr>
-        <a:solidFill>
-          <a:srgbClr val="1F2A44"/>
-        </a:solidFill>
-        <a:effectLst/>
-      </p:bgPr>
-    </p:bg>
-    <p:spTree>
-      <p:nvGrpSpPr>
-        <p:cNvPr id="1" name=""/>
-        <p:cNvGrpSpPr/>
-        <p:nvPr/>
-      </p:nvGrpSpPr>
-      <p:grpSpPr/>
-      <p:sp>
-        <p:nvSpPr>
-          <p:cNvPr id="2" name="TextBox 1"/>
-          <p:cNvSpPr txBox="1"/>
-          <p:nvPr/>
-        </p:nvSpPr>
-        <p:spPr>
-          <a:xfrm>
-            <a:off x="640000" y="380000"/>
-            <a:ext cx="10912000" cy="420000"/>
-          </a:xfrm>
-          <a:prstGeom prst="rect">
-            <a:avLst/>
-          </a:prstGeom>
-          <a:noFill/>
-        </p:spPr>
-        <p:txBody>
-          <a:bodyPr wrap="square">
-            <a:spAutoFit/>
-          </a:bodyPr>
-          <a:lstStyle/>
-          <a:p>
-            <a:pPr>
-              <a:spcAft>
-                <a:spcPts val="630"/>
-              </a:spcAft>
-            </a:pPr>
-            <a:r>
-              <a:rPr sz="1400" b="1">
-                <a:solidFill>
-                  <a:srgbClr val="F4B183"/>
-                </a:solidFill>
-                <a:latin typeface="Nunito Sans"/>
-              </a:rPr>
               <a:t>AHORA, LA HOJA DEL DÍA</a:t>
             </a:r>
           </a:p>
@@ -6136,7 +6347,7 @@
                 </a:solidFill>
                 <a:latin typeface="Nunito Sans"/>
               </a:rPr>
-              <a:t>Emigrar es salir del lugar donde vivías; ______ es llegar a vivir a un lugar nuevo.  (sesión 85)</a:t>
+              <a:t>Las apuestas son un ejemplo de adicción sin ______.  (sesión 85)</a:t>
             </a:r>
           </a:p>
           <a:p>
@@ -6161,7 +6372,7 @@
                 </a:solidFill>
                 <a:latin typeface="Nunito Sans"/>
               </a:rPr>
-              <a:t>Decir que los migrantes son «todos buenísimos» también es una generalización ______.  (sesión 85)</a:t>
+              <a:t>Para los menores, la cantidad de alcohol que recomienda Sanidad es ______.  (sesión 85)</a:t>
             </a:r>
           </a:p>
           <a:p>
@@ -6186,7 +6397,7 @@
                 </a:solidFill>
                 <a:latin typeface="Nunito Sans"/>
               </a:rPr>
-              <a:t>Un ______ de género es el papel que se espera que haga una persona por ser hombre o mujer.  (sesión 81)</a:t>
+              <a:t>Elementos de una cultura: costumbres, creencias, ______, arte, objetos y formas de relacionarse.  (sesión 81)</a:t>
             </a:r>
           </a:p>
         </p:txBody>
@@ -6338,7 +6549,7 @@
                 </a:solidFill>
                 <a:latin typeface="Nunito Sans"/>
               </a:rPr>
-              <a:t>Emigrar es salir del lugar donde vivías; </a:t>
+              <a:t>Las apuestas son un ejemplo de adicción sin </a:t>
             </a:r>
             <a:r>
               <a:rPr sz="2600" b="1">
@@ -6347,7 +6558,7 @@
                 </a:solidFill>
                 <a:latin typeface="Nunito Sans"/>
               </a:rPr>
-              <a:t>inmigrar</a:t>
+              <a:t>sustancia</a:t>
             </a:r>
             <a:r>
               <a:rPr sz="2600" b="0">
@@ -6356,7 +6567,7 @@
                 </a:solidFill>
                 <a:latin typeface="Nunito Sans"/>
               </a:rPr>
-              <a:t> es llegar a vivir a un lugar nuevo.  (sesión 85)</a:t>
+              <a:t>.  (sesión 85)</a:t>
             </a:r>
           </a:p>
           <a:p>
@@ -6381,7 +6592,7 @@
                 </a:solidFill>
                 <a:latin typeface="Nunito Sans"/>
               </a:rPr>
-              <a:t>Decir que los migrantes son «todos buenísimos» también es una generalización </a:t>
+              <a:t>Para los menores, la cantidad de alcohol que recomienda Sanidad es </a:t>
             </a:r>
             <a:r>
               <a:rPr sz="2600" b="1">
@@ -6390,7 +6601,7 @@
                 </a:solidFill>
                 <a:latin typeface="Nunito Sans"/>
               </a:rPr>
-              <a:t>apresurada</a:t>
+              <a:t>cero</a:t>
             </a:r>
             <a:r>
               <a:rPr sz="2600" b="0">
@@ -6424,7 +6635,7 @@
                 </a:solidFill>
                 <a:latin typeface="Nunito Sans"/>
               </a:rPr>
-              <a:t>Un </a:t>
+              <a:t>Elementos de una cultura: costumbres, creencias, </a:t>
             </a:r>
             <a:r>
               <a:rPr sz="2600" b="1">
@@ -6433,7 +6644,7 @@
                 </a:solidFill>
                 <a:latin typeface="Nunito Sans"/>
               </a:rPr>
-              <a:t>rol</a:t>
+              <a:t>lengua</a:t>
             </a:r>
             <a:r>
               <a:rPr sz="2600" b="0">
@@ -6442,7 +6653,7 @@
                 </a:solidFill>
                 <a:latin typeface="Nunito Sans"/>
               </a:rPr>
-              <a:t> de género es el papel que se espera que haga una persona por ser hombre o mujer.  (sesión 81)</a:t>
+              <a:t>, arte, objetos y formas de relacionarse.  (sesión 81)</a:t>
             </a:r>
           </a:p>
         </p:txBody>
@@ -6589,7 +6800,7 @@
                 </a:solidFill>
                 <a:latin typeface="Nunito Sans"/>
               </a:rPr>
-              <a:t>Dos personas preguntan por una calle en Gran Vía. Una lleva traje y maletín. La otra, ropa vieja y una mochila enorme. Casi todos atienden solo a la primera.</a:t>
+              <a:t>Alguien le dice a una chica: «Si no vas a la universidad, serás una fracasada».</a:t>
             </a:r>
           </a:p>
         </p:txBody>
@@ -6628,7 +6839,7 @@
                 </a:solidFill>
                 <a:latin typeface="Nunito Sans"/>
               </a:rPr>
-              <a:t>¿Qué ven los que pasan de largo?</a:t>
+              <a:t>¿Cuántos caminos ves en esa frase? ¿Cuántos crees que hay de verdad?</a:t>
             </a:r>
           </a:p>
         </p:txBody>
@@ -6732,7 +6943,7 @@
                 </a:solidFill>
                 <a:latin typeface="Fredoka"/>
               </a:rPr>
-              <a:t>Cómo funciona un prejuicio</a:t>
+              <a:t>Después de 4.º de ESO</a:t>
             </a:r>
           </a:p>
         </p:txBody>
@@ -6797,7 +7008,7 @@
                 </a:solidFill>
                 <a:latin typeface="Nunito Sans"/>
               </a:rPr>
-              <a:t>BLOQUE 1 · CÓMO FUNCIONA UN PREJUICIO</a:t>
+              <a:t>BLOQUE 1 · DESPUÉS DE 4.º DE ESO</a:t>
             </a:r>
           </a:p>
         </p:txBody>
@@ -6836,7 +7047,7 @@
                 </a:solidFill>
                 <a:latin typeface="Fredoka"/>
               </a:rPr>
-              <a:t>Prejuicio</a:t>
+              <a:t>Título de Graduado en ESO</a:t>
             </a:r>
           </a:p>
         </p:txBody>
@@ -6918,7 +7129,7 @@
                 </a:solidFill>
                 <a:latin typeface="Nunito Sans"/>
               </a:rPr>
-              <a:t>Es juzgar a una persona antes de conocerla, solo por el grupo al que pertenece.</a:t>
+              <a:t>Es el título que se obtiene al terminar la ESO. Abre el Bachillerato y la FP de grado medio.</a:t>
             </a:r>
           </a:p>
         </p:txBody>
@@ -6966,7 +7177,7 @@
                 </a:solidFill>
                 <a:latin typeface="Nunito Sans"/>
               </a:rPr>
-              <a:t>Pre-juicio: un juicio </a:t>
+              <a:t>Lo decide el </a:t>
             </a:r>
             <a:r>
               <a:rPr sz="2800" b="1">
@@ -6975,7 +7186,7 @@
                 </a:solidFill>
                 <a:latin typeface="Nunito Sans"/>
               </a:rPr>
-              <a:t>antes</a:t>
+              <a:t>equipo de profesores</a:t>
             </a:r>
             <a:r>
               <a:rPr sz="2800" b="0">
@@ -6984,7 +7195,7 @@
                 </a:solidFill>
                 <a:latin typeface="Nunito Sans"/>
               </a:rPr>
-              <a:t> de conocer</a:t>
+              <a:t> al final de la ESO</a:t>
             </a:r>
           </a:p>
           <a:p>
@@ -7003,13 +7214,22 @@
               <a:t>• </a:t>
             </a:r>
             <a:r>
+              <a:rPr sz="2800" b="1">
+                <a:solidFill>
+                  <a:srgbClr val="1F2A44"/>
+                </a:solidFill>
+                <a:latin typeface="Nunito Sans"/>
+              </a:rPr>
+              <a:t>FP:</a:t>
+            </a:r>
+            <a:r>
               <a:rPr sz="2800" b="0">
                 <a:solidFill>
                   <a:srgbClr val="1F2A44"/>
                 </a:solidFill>
                 <a:latin typeface="Nunito Sans"/>
               </a:rPr>
-              <a:t>Suele ser negativo y cuesta mucho cambiarlo</a:t>
+              <a:t> Formación Profesional, estudios para aprender una profesión</a:t>
             </a:r>
           </a:p>
           <a:p>
@@ -7034,7 +7254,68 @@
                 </a:solidFill>
                 <a:latin typeface="Nunito Sans"/>
               </a:rPr>
-              <a:t>Se aprende: nadie nace con prejuicios</a:t>
+              <a:t>Sin el título: FP de </a:t>
+            </a:r>
+            <a:r>
+              <a:rPr sz="2800" b="1">
+                <a:solidFill>
+                  <a:srgbClr val="1F2A44"/>
+                </a:solidFill>
+                <a:latin typeface="Nunito Sans"/>
+              </a:rPr>
+              <a:t>grado básico</a:t>
+            </a:r>
+            <a:r>
+              <a:rPr sz="2800" b="0">
+                <a:solidFill>
+                  <a:srgbClr val="1F2A44"/>
+                </a:solidFill>
+                <a:latin typeface="Nunito Sans"/>
+              </a:rPr>
+              <a:t>, que también lo da</a:t>
+            </a:r>
+          </a:p>
+          <a:p>
+            <a:pPr>
+              <a:spcAft>
+                <a:spcPts val="1260"/>
+              </a:spcAft>
+            </a:pPr>
+            <a:r>
+              <a:rPr sz="2800" b="1">
+                <a:solidFill>
+                  <a:srgbClr val="E8793A"/>
+                </a:solidFill>
+                <a:latin typeface="Nunito Sans"/>
+              </a:rPr>
+              <a:t>• </a:t>
+            </a:r>
+            <a:r>
+              <a:rPr sz="2800" b="0">
+                <a:solidFill>
+                  <a:srgbClr val="1F2A44"/>
+                </a:solidFill>
+                <a:latin typeface="Nunito Sans"/>
+              </a:rPr>
+              <a:t>La enseñanza es </a:t>
+            </a:r>
+            <a:r>
+              <a:rPr sz="2800" b="1">
+                <a:solidFill>
+                  <a:srgbClr val="1F2A44"/>
+                </a:solidFill>
+                <a:latin typeface="Nunito Sans"/>
+              </a:rPr>
+              <a:t>obligatoria</a:t>
+            </a:r>
+            <a:r>
+              <a:rPr sz="2800" b="0">
+                <a:solidFill>
+                  <a:srgbClr val="1F2A44"/>
+                </a:solidFill>
+                <a:latin typeface="Nunito Sans"/>
+              </a:rPr>
+              <a:t> hasta los 16 años</a:t>
             </a:r>
           </a:p>
         </p:txBody>
@@ -7099,7 +7380,7 @@
                 </a:solidFill>
                 <a:latin typeface="Nunito Sans"/>
               </a:rPr>
-              <a:t>BLOQUE 1 · CÓMO FUNCIONA UN PREJUICIO</a:t>
+              <a:t>BLOQUE 1 · DESPUÉS DE 4.º DE ESO</a:t>
             </a:r>
           </a:p>
         </p:txBody>
@@ -7138,7 +7419,7 @@
                 </a:solidFill>
                 <a:latin typeface="Fredoka"/>
               </a:rPr>
-              <a:t>De la idea al acto</a:t>
+              <a:t>Caminos después de 4.º de ESO</a:t>
             </a:r>
           </a:p>
         </p:txBody>
@@ -7153,7 +7434,7 @@
         </p:nvGraphicFramePr>
         <p:xfrm>
           <a:off x="640000" y="1700000"/>
-          <a:ext cx="10912000" cy="2400000"/>
+          <a:ext cx="10912000" cy="3000000"/>
         </p:xfrm>
         <a:graphic>
           <a:graphicData uri="http://schemas.openxmlformats.org/drawingml/2006/table">
@@ -7179,7 +7460,7 @@
                           </a:solidFill>
                           <a:latin typeface="Fredoka"/>
                         </a:rPr>
-                        <a:t>Paso</a:t>
+                        <a:t>Camino</a:t>
                       </a:r>
                     </a:p>
                   </a:txBody>
@@ -7223,7 +7504,7 @@
                           </a:solidFill>
                           <a:latin typeface="Fredoka"/>
                         </a:rPr>
-                        <a:t>Ejemplo inventado</a:t>
+                        <a:t>Y después</a:t>
                       </a:r>
                     </a:p>
                   </a:txBody>
@@ -7247,16 +7528,7 @@
                           </a:solidFill>
                           <a:latin typeface="Nunito Sans"/>
                         </a:rPr>
-                        <a:t>Estereotipo</a:t>
-                      </a:r>
-                      <a:r>
-                        <a:rPr sz="2000" b="0">
-                          <a:solidFill>
-                            <a:srgbClr val="1F2A44"/>
-                          </a:solidFill>
-                          <a:latin typeface="Nunito Sans"/>
-                        </a:rPr>
-                        <a:t> (sesión 45)</a:t>
+                        <a:t>Bachillerato</a:t>
                       </a:r>
                     </a:p>
                   </a:txBody>
@@ -7278,7 +7550,7 @@
                           </a:solidFill>
                           <a:latin typeface="Nunito Sans"/>
                         </a:rPr>
-                        <a:t>Una idea fija sobre un grupo</a:t>
+                        <a:t>Dos cursos de estudios generales, por modalidades</a:t>
                       </a:r>
                     </a:p>
                   </a:txBody>
@@ -7300,7 +7572,7 @@
                           </a:solidFill>
                           <a:latin typeface="Nunito Sans"/>
                         </a:rPr>
-                        <a:t>«Los de ese barrio son conflictivos»</a:t>
+                        <a:t>Universidad o FP de grado superior</a:t>
                       </a:r>
                     </a:p>
                   </a:txBody>
@@ -7324,7 +7596,7 @@
                           </a:solidFill>
                           <a:latin typeface="Nunito Sans"/>
                         </a:rPr>
-                        <a:t>Prejuicio</a:t>
+                        <a:t>FP de grado medio</a:t>
                       </a:r>
                     </a:p>
                   </a:txBody>
@@ -7346,7 +7618,7 @@
                           </a:solidFill>
                           <a:latin typeface="Nunito Sans"/>
                         </a:rPr>
-                        <a:t>Un juicio o rechazo antes de conocer</a:t>
+                        <a:t>Dos cursos para aprender una profesión, con prácticas en empresas</a:t>
                       </a:r>
                     </a:p>
                   </a:txBody>
@@ -7368,7 +7640,7 @@
                           </a:solidFill>
                           <a:latin typeface="Nunito Sans"/>
                         </a:rPr>
-                        <a:t>«Seguro que el nuevo es conflictivo»</a:t>
+                        <a:t>Trabajar, FP de grado superior o Bachillerato</a:t>
                       </a:r>
                     </a:p>
                   </a:txBody>
@@ -7392,7 +7664,7 @@
                           </a:solidFill>
                           <a:latin typeface="Nunito Sans"/>
                         </a:rPr>
-                        <a:t>Discriminación</a:t>
+                        <a:t>FP de grado básico</a:t>
                       </a:r>
                     </a:p>
                   </a:txBody>
@@ -7414,7 +7686,7 @@
                           </a:solidFill>
                           <a:latin typeface="Nunito Sans"/>
                         </a:rPr>
-                        <a:t>Tratar peor a alguien por su grupo</a:t>
+                        <a:t>Sin título de ESO: aprendes una profesión y te da el título</a:t>
                       </a:r>
                     </a:p>
                   </a:txBody>
@@ -7436,13 +7708,81 @@
                           </a:solidFill>
                           <a:latin typeface="Nunito Sans"/>
                         </a:rPr>
-                        <a:t>No dejarle entrar en el equipo</a:t>
+                        <a:t>FP de grado medio o trabajar</a:t>
                       </a:r>
                     </a:p>
                   </a:txBody>
                   <a:tcPr>
                     <a:solidFill>
                       <a:srgbClr val="FFFFFF"/>
+                    </a:solidFill>
+                  </a:tcPr>
+                </a:tc>
+              </a:tr>
+              <a:tr h="600000">
+                <a:tc>
+                  <a:txBody>
+                    <a:bodyPr/>
+                    <a:lstStyle/>
+                    <a:p>
+                      <a:r>
+                        <a:rPr sz="2000" b="1">
+                          <a:solidFill>
+                            <a:srgbClr val="1F2A44"/>
+                          </a:solidFill>
+                          <a:latin typeface="Nunito Sans"/>
+                        </a:rPr>
+                        <a:t>FP de grado superior</a:t>
+                      </a:r>
+                    </a:p>
+                  </a:txBody>
+                  <a:tcPr>
+                    <a:solidFill>
+                      <a:srgbClr val="EAF0F7"/>
+                    </a:solidFill>
+                  </a:tcPr>
+                </a:tc>
+                <a:tc>
+                  <a:txBody>
+                    <a:bodyPr/>
+                    <a:lstStyle/>
+                    <a:p>
+                      <a:r>
+                        <a:rPr sz="2000" b="0">
+                          <a:solidFill>
+                            <a:srgbClr val="1F2A44"/>
+                          </a:solidFill>
+                          <a:latin typeface="Nunito Sans"/>
+                        </a:rPr>
+                        <a:t>Tras Bachillerato o grado medio: dos cursos más especializados</a:t>
+                      </a:r>
+                    </a:p>
+                  </a:txBody>
+                  <a:tcPr>
+                    <a:solidFill>
+                      <a:srgbClr val="EAF0F7"/>
+                    </a:solidFill>
+                  </a:tcPr>
+                </a:tc>
+                <a:tc>
+                  <a:txBody>
+                    <a:bodyPr/>
+                    <a:lstStyle/>
+                    <a:p>
+                      <a:r>
+                        <a:rPr sz="2000" b="0">
+                          <a:solidFill>
+                            <a:srgbClr val="1F2A44"/>
+                          </a:solidFill>
+                          <a:latin typeface="Nunito Sans"/>
+                        </a:rPr>
+                        <a:t>Trabajar o universidad</a:t>
+                      </a:r>
+                    </a:p>
+                  </a:txBody>
+                  <a:tcPr>
+                    <a:solidFill>
+                      <a:srgbClr val="EAF0F7"/>
                     </a:solidFill>
                   </a:tcPr>
                 </a:tc>
@@ -7511,7 +7851,7 @@
                 </a:solidFill>
                 <a:latin typeface="Nunito Sans"/>
               </a:rPr>
-              <a:t>BLOQUE 1 · CÓMO FUNCIONA UN PREJUICIO</a:t>
+              <a:t>BLOQUE 1 · DESPUÉS DE 4.º DE ESO</a:t>
             </a:r>
           </a:p>
         </p:txBody>
@@ -7550,318 +7890,7 @@
                 </a:solidFill>
                 <a:latin typeface="Fredoka"/>
               </a:rPr>
-              <a:t>Aporofobia</a:t>
-            </a:r>
-          </a:p>
-        </p:txBody>
-      </p:sp>
-      <p:sp>
-        <p:nvSpPr>
-          <p:cNvPr id="4" name="Rectangle 3"/>
-          <p:cNvSpPr/>
-          <p:nvPr/>
-        </p:nvSpPr>
-        <p:spPr>
-          <a:xfrm>
-            <a:off x="640000" y="1650000"/>
-            <a:ext cx="10912000" cy="1150000"/>
-          </a:xfrm>
-          <a:prstGeom prst="rect">
-            <a:avLst/>
-          </a:prstGeom>
-          <a:solidFill>
-            <a:srgbClr val="EAF0F7"/>
-          </a:solidFill>
-          <a:ln>
-            <a:noFill/>
-          </a:ln>
-        </p:spPr>
-        <p:style>
-          <a:lnRef idx="1">
-            <a:schemeClr val="accent1"/>
-          </a:lnRef>
-          <a:fillRef idx="3">
-            <a:schemeClr val="accent1"/>
-          </a:fillRef>
-          <a:effectRef idx="2">
-            <a:schemeClr val="accent1"/>
-          </a:effectRef>
-          <a:fontRef idx="minor">
-            <a:schemeClr val="lt1"/>
-          </a:fontRef>
-        </p:style>
-        <p:txBody>
-          <a:bodyPr rtlCol="0" anchor="ctr"/>
-          <a:lstStyle/>
-          <a:p>
-            <a:pPr algn="ctr"/>
-          </a:p>
-        </p:txBody>
-      </p:sp>
-      <p:sp>
-        <p:nvSpPr>
-          <p:cNvPr id="5" name="TextBox 4"/>
-          <p:cNvSpPr txBox="1"/>
-          <p:nvPr/>
-        </p:nvSpPr>
-        <p:spPr>
-          <a:xfrm>
-            <a:off x="840000" y="1730000"/>
-            <a:ext cx="10512000" cy="1000000"/>
-          </a:xfrm>
-          <a:prstGeom prst="rect">
-            <a:avLst/>
-          </a:prstGeom>
-          <a:noFill/>
-        </p:spPr>
-        <p:txBody>
-          <a:bodyPr wrap="square" anchor="ctr">
-            <a:spAutoFit/>
-          </a:bodyPr>
-          <a:lstStyle/>
-          <a:p>
-            <a:pPr>
-              <a:spcAft>
-                <a:spcPts val="1260"/>
-              </a:spcAft>
-            </a:pPr>
-            <a:r>
-              <a:rPr sz="2800" b="1">
-                <a:solidFill>
-                  <a:srgbClr val="1F2A44"/>
-                </a:solidFill>
-                <a:latin typeface="Nunito Sans"/>
-              </a:rPr>
-              <a:t>Es el rechazo a las personas pobres, solo por ser pobres.</a:t>
-            </a:r>
-          </a:p>
-        </p:txBody>
-      </p:sp>
-      <p:sp>
-        <p:nvSpPr>
-          <p:cNvPr id="6" name="TextBox 5"/>
-          <p:cNvSpPr txBox="1"/>
-          <p:nvPr/>
-        </p:nvSpPr>
-        <p:spPr>
-          <a:xfrm>
-            <a:off x="640000" y="3000000"/>
-            <a:ext cx="10912000" cy="3458000"/>
-          </a:xfrm>
-          <a:prstGeom prst="rect">
-            <a:avLst/>
-          </a:prstGeom>
-          <a:noFill/>
-        </p:spPr>
-        <p:txBody>
-          <a:bodyPr wrap="square">
-            <a:spAutoFit/>
-          </a:bodyPr>
-          <a:lstStyle/>
-          <a:p>
-            <a:pPr>
-              <a:spcAft>
-                <a:spcPts val="1260"/>
-              </a:spcAft>
-            </a:pPr>
-            <a:r>
-              <a:rPr sz="2800" b="1">
-                <a:solidFill>
-                  <a:srgbClr val="E8793A"/>
-                </a:solidFill>
-                <a:latin typeface="Nunito Sans"/>
-              </a:rPr>
-              <a:t>• </a:t>
-            </a:r>
-            <a:r>
-              <a:rPr sz="2800" b="0">
-                <a:solidFill>
-                  <a:srgbClr val="1F2A44"/>
-                </a:solidFill>
-                <a:latin typeface="Nunito Sans"/>
-              </a:rPr>
-              <a:t>Palabra creada por la filósofa </a:t>
-            </a:r>
-            <a:r>
-              <a:rPr sz="2800" b="1">
-                <a:solidFill>
-                  <a:srgbClr val="1F2A44"/>
-                </a:solidFill>
-                <a:latin typeface="Nunito Sans"/>
-              </a:rPr>
-              <a:t>Adela Cortina</a:t>
-            </a:r>
-          </a:p>
-          <a:p>
-            <a:pPr>
-              <a:spcAft>
-                <a:spcPts val="1260"/>
-              </a:spcAft>
-            </a:pPr>
-            <a:r>
-              <a:rPr sz="2800" b="1">
-                <a:solidFill>
-                  <a:srgbClr val="E8793A"/>
-                </a:solidFill>
-                <a:latin typeface="Nunito Sans"/>
-              </a:rPr>
-              <a:t>• </a:t>
-            </a:r>
-            <a:r>
-              <a:rPr sz="2800" b="0">
-                <a:solidFill>
-                  <a:srgbClr val="1F2A44"/>
-                </a:solidFill>
-                <a:latin typeface="Nunito Sans"/>
-              </a:rPr>
-              <a:t>La RAE la aceptó en el diccionario en </a:t>
-            </a:r>
-            <a:r>
-              <a:rPr sz="2800" b="1">
-                <a:solidFill>
-                  <a:srgbClr val="1F2A44"/>
-                </a:solidFill>
-                <a:latin typeface="Nunito Sans"/>
-              </a:rPr>
-              <a:t>2017</a:t>
-            </a:r>
-          </a:p>
-          <a:p>
-            <a:pPr>
-              <a:spcAft>
-                <a:spcPts val="1260"/>
-              </a:spcAft>
-            </a:pPr>
-            <a:r>
-              <a:rPr sz="2800" b="1">
-                <a:solidFill>
-                  <a:srgbClr val="E8793A"/>
-                </a:solidFill>
-                <a:latin typeface="Nunito Sans"/>
-              </a:rPr>
-              <a:t>• </a:t>
-            </a:r>
-            <a:r>
-              <a:rPr sz="2800" b="0">
-                <a:solidFill>
-                  <a:srgbClr val="1F2A44"/>
-                </a:solidFill>
-                <a:latin typeface="Nunito Sans"/>
-              </a:rPr>
-              <a:t>Su idea: a menudo no molesta el de fuera, sino el </a:t>
-            </a:r>
-            <a:r>
-              <a:rPr sz="2800" b="1">
-                <a:solidFill>
-                  <a:srgbClr val="1F2A44"/>
-                </a:solidFill>
-                <a:latin typeface="Nunito Sans"/>
-              </a:rPr>
-              <a:t>pobre</a:t>
-            </a:r>
-          </a:p>
-        </p:txBody>
-      </p:sp>
-    </p:spTree>
-  </p:cSld>
-  <p:clrMapOvr>
-    <a:masterClrMapping/>
-  </p:clrMapOvr>
-</p:sld>
-</file>
-
-<file path=ppt/slides/slide9.xml><?xml version="1.0" encoding="utf-8"?>
-<p:sld xmlns:a="http://schemas.openxmlformats.org/drawingml/2006/main" xmlns:p="http://schemas.openxmlformats.org/presentationml/2006/main" xmlns:r="http://schemas.openxmlformats.org/officeDocument/2006/relationships">
-  <p:cSld>
-    <p:bg>
-      <p:bgPr>
-        <a:solidFill>
-          <a:srgbClr val="FBF7EF"/>
-        </a:solidFill>
-        <a:effectLst/>
-      </p:bgPr>
-    </p:bg>
-    <p:spTree>
-      <p:nvGrpSpPr>
-        <p:cNvPr id="1" name=""/>
-        <p:cNvGrpSpPr/>
-        <p:nvPr/>
-      </p:nvGrpSpPr>
-      <p:grpSpPr/>
-      <p:sp>
-        <p:nvSpPr>
-          <p:cNvPr id="2" name="TextBox 1"/>
-          <p:cNvSpPr txBox="1"/>
-          <p:nvPr/>
-        </p:nvSpPr>
-        <p:spPr>
-          <a:xfrm>
-            <a:off x="640000" y="380000"/>
-            <a:ext cx="10912000" cy="420000"/>
-          </a:xfrm>
-          <a:prstGeom prst="rect">
-            <a:avLst/>
-          </a:prstGeom>
-          <a:noFill/>
-        </p:spPr>
-        <p:txBody>
-          <a:bodyPr wrap="square">
-            <a:spAutoFit/>
-          </a:bodyPr>
-          <a:lstStyle/>
-          <a:p>
-            <a:pPr>
-              <a:spcAft>
-                <a:spcPts val="630"/>
-              </a:spcAft>
-            </a:pPr>
-            <a:r>
-              <a:rPr sz="1400" b="1">
-                <a:solidFill>
-                  <a:srgbClr val="E8793A"/>
-                </a:solidFill>
-                <a:latin typeface="Nunito Sans"/>
-              </a:rPr>
-              <a:t>BLOQUE 1 · CÓMO FUNCIONA UN PREJUICIO</a:t>
-            </a:r>
-          </a:p>
-        </p:txBody>
-      </p:sp>
-      <p:sp>
-        <p:nvSpPr>
-          <p:cNvPr id="3" name="TextBox 2"/>
-          <p:cNvSpPr txBox="1"/>
-          <p:nvPr/>
-        </p:nvSpPr>
-        <p:spPr>
-          <a:xfrm>
-            <a:off x="640000" y="760000"/>
-            <a:ext cx="10912000" cy="800000"/>
-          </a:xfrm>
-          <a:prstGeom prst="rect">
-            <a:avLst/>
-          </a:prstGeom>
-          <a:noFill/>
-        </p:spPr>
-        <p:txBody>
-          <a:bodyPr wrap="square">
-            <a:spAutoFit/>
-          </a:bodyPr>
-          <a:lstStyle/>
-          <a:p>
-            <a:pPr>
-              <a:spcAft>
-                <a:spcPts val="1710"/>
-              </a:spcAft>
-            </a:pPr>
-            <a:r>
-              <a:rPr sz="3800" b="1">
-                <a:solidFill>
-                  <a:srgbClr val="1F2A44"/>
-                </a:solidFill>
-                <a:latin typeface="Fredoka"/>
-              </a:rPr>
-              <a:t>Otras exclusiones</a:t>
+              <a:t>Algunos derechos y deberes en el instituto</a:t>
             </a:r>
           </a:p>
         </p:txBody>
@@ -7876,7 +7905,7 @@
         </p:nvGraphicFramePr>
         <p:xfrm>
           <a:off x="640000" y="1700000"/>
-          <a:ext cx="10912000" cy="3000000"/>
+          <a:ext cx="10912000" cy="2400000"/>
         </p:xfrm>
         <a:graphic>
           <a:graphicData uri="http://schemas.openxmlformats.org/drawingml/2006/table">
@@ -7885,8 +7914,9 @@
                 <a:tableStyleId>{5C22544A-7EE6-4342-B048-85BDC9FD1C3A}</a:tableStyleId>
               </a:tblPr>
               <a:tblGrid>
-                <a:gridCol w="5456000"/>
-                <a:gridCol w="5456000"/>
+                <a:gridCol w="3637333"/>
+                <a:gridCol w="3637333"/>
+                <a:gridCol w="3637334"/>
               </a:tblGrid>
               <a:tr h="600000">
                 <a:tc>
@@ -7901,7 +7931,7 @@
                           </a:solidFill>
                           <a:latin typeface="Fredoka"/>
                         </a:rPr>
-                        <a:t>Palabra</a:t>
+                        <a:t>Quién</a:t>
                       </a:r>
                     </a:p>
                   </a:txBody>
@@ -7923,7 +7953,29 @@
                           </a:solidFill>
                           <a:latin typeface="Fredoka"/>
                         </a:rPr>
-                        <a:t>Rechazo o trato peor a…</a:t>
+                        <a:t>Algunos derechos</a:t>
+                      </a:r>
+                    </a:p>
+                  </a:txBody>
+                  <a:tcPr>
+                    <a:solidFill>
+                      <a:srgbClr val="1F2A44"/>
+                    </a:solidFill>
+                  </a:tcPr>
+                </a:tc>
+                <a:tc>
+                  <a:txBody>
+                    <a:bodyPr/>
+                    <a:lstStyle/>
+                    <a:p>
+                      <a:r>
+                        <a:rPr sz="2000" b="1">
+                          <a:solidFill>
+                            <a:srgbClr val="FBF7EF"/>
+                          </a:solidFill>
+                          <a:latin typeface="Fredoka"/>
+                        </a:rPr>
+                        <a:t>Algunos deberes</a:t>
                       </a:r>
                     </a:p>
                   </a:txBody>
@@ -7947,7 +7999,7 @@
                           </a:solidFill>
                           <a:latin typeface="Nunito Sans"/>
                         </a:rPr>
-                        <a:t>Xenofobia</a:t>
+                        <a:t>Alumnado</a:t>
                       </a:r>
                     </a:p>
                   </a:txBody>
@@ -7969,7 +8021,47 @@
                           </a:solidFill>
                           <a:latin typeface="Nunito Sans"/>
                         </a:rPr>
-                        <a:t>Las personas extranjeras, por ser de fuera</a:t>
+                        <a:t>Formación, respeto, evaluación </a:t>
+                      </a:r>
+                      <a:r>
+                        <a:rPr sz="2000" b="1">
+                          <a:solidFill>
+                            <a:srgbClr val="1F2A44"/>
+                          </a:solidFill>
+                          <a:latin typeface="Nunito Sans"/>
+                        </a:rPr>
+                        <a:t>objetiva</a:t>
+                      </a:r>
+                      <a:r>
+                        <a:rPr sz="2000" b="0">
+                          <a:solidFill>
+                            <a:srgbClr val="1F2A44"/>
+                          </a:solidFill>
+                          <a:latin typeface="Nunito Sans"/>
+                        </a:rPr>
+                        <a:t>, orientación</a:t>
+                      </a:r>
+                    </a:p>
+                  </a:txBody>
+                  <a:tcPr>
+                    <a:solidFill>
+                      <a:srgbClr val="FFFFFF"/>
+                    </a:solidFill>
+                  </a:tcPr>
+                </a:tc>
+                <a:tc>
+                  <a:txBody>
+                    <a:bodyPr/>
+                    <a:lstStyle/>
+                    <a:p>
+                      <a:r>
+                        <a:rPr sz="2000" b="0">
+                          <a:solidFill>
+                            <a:srgbClr val="1F2A44"/>
+                          </a:solidFill>
+                          <a:latin typeface="Nunito Sans"/>
+                        </a:rPr>
+                        <a:t>Estudiar, asistir, respetar a todos y las normas</a:t>
                       </a:r>
                     </a:p>
                   </a:txBody>
@@ -7993,7 +8085,7 @@
                           </a:solidFill>
                           <a:latin typeface="Nunito Sans"/>
                         </a:rPr>
-                        <a:t>Racismo</a:t>
+                        <a:t>Familias</a:t>
                       </a:r>
                     </a:p>
                   </a:txBody>
@@ -8015,7 +8107,29 @@
                           </a:solidFill>
                           <a:latin typeface="Nunito Sans"/>
                         </a:rPr>
-                        <a:t>Personas por su origen o su color de piel</a:t>
+                        <a:t>Estar informadas y participar en el centro</a:t>
+                      </a:r>
+                    </a:p>
+                  </a:txBody>
+                  <a:tcPr>
+                    <a:solidFill>
+                      <a:srgbClr val="EAF0F7"/>
+                    </a:solidFill>
+                  </a:tcPr>
+                </a:tc>
+                <a:tc>
+                  <a:txBody>
+                    <a:bodyPr/>
+                    <a:lstStyle/>
+                    <a:p>
+                      <a:r>
+                        <a:rPr sz="2000" b="0">
+                          <a:solidFill>
+                            <a:srgbClr val="1F2A44"/>
+                          </a:solidFill>
+                          <a:latin typeface="Nunito Sans"/>
+                        </a:rPr>
+                        <a:t>Colaborar con el centro y cuidar la asistencia</a:t>
                       </a:r>
                     </a:p>
                   </a:txBody>
@@ -8039,7 +8153,7 @@
                           </a:solidFill>
                           <a:latin typeface="Nunito Sans"/>
                         </a:rPr>
-                        <a:t>Homofobia</a:t>
+                        <a:t>Profesorado</a:t>
                       </a:r>
                     </a:p>
                   </a:txBody>
@@ -8061,37 +8175,13 @@
                           </a:solidFill>
                           <a:latin typeface="Nunito Sans"/>
                         </a:rPr>
-                        <a:t>Las personas homosexuales: gais y lesbianas</a:t>
+                        <a:t>Respeto y apoyo para enseñar</a:t>
                       </a:r>
                     </a:p>
                   </a:txBody>
                   <a:tcPr>
                     <a:solidFill>
                       <a:srgbClr val="FFFFFF"/>
-                    </a:solidFill>
-                  </a:tcPr>
-                </a:tc>
-              </a:tr>
-              <a:tr h="600000">
-                <a:tc>
-                  <a:txBody>
-                    <a:bodyPr/>
-                    <a:lstStyle/>
-                    <a:p>
-                      <a:r>
-                        <a:rPr sz="2000" b="1">
-                          <a:solidFill>
-                            <a:srgbClr val="1F2A44"/>
-                          </a:solidFill>
-                          <a:latin typeface="Nunito Sans"/>
-                        </a:rPr>
-                        <a:t>Transfobia</a:t>
-                      </a:r>
-                    </a:p>
-                  </a:txBody>
-                  <a:tcPr>
-                    <a:solidFill>
-                      <a:srgbClr val="EAF0F7"/>
                     </a:solidFill>
                   </a:tcPr>
                 </a:tc>
@@ -8107,13 +8197,13 @@
                           </a:solidFill>
                           <a:latin typeface="Nunito Sans"/>
                         </a:rPr>
-                        <a:t>Las personas trans, por su identidad de género</a:t>
+                        <a:t>Enseñar, evaluar con objetividad y orientar</a:t>
                       </a:r>
                     </a:p>
                   </a:txBody>
                   <a:tcPr>
                     <a:solidFill>
-                      <a:srgbClr val="EAF0F7"/>
+                      <a:srgbClr val="FFFFFF"/>
                     </a:solidFill>
                   </a:tcPr>
                 </a:tc>
@@ -8122,6 +8212,110 @@
           </a:graphicData>
         </a:graphic>
       </p:graphicFrame>
+    </p:spTree>
+  </p:cSld>
+  <p:clrMapOvr>
+    <a:masterClrMapping/>
+  </p:clrMapOvr>
+</p:sld>
+</file>
+
+<file path=ppt/slides/slide9.xml><?xml version="1.0" encoding="utf-8"?>
+<p:sld xmlns:a="http://schemas.openxmlformats.org/drawingml/2006/main" xmlns:p="http://schemas.openxmlformats.org/presentationml/2006/main" xmlns:r="http://schemas.openxmlformats.org/officeDocument/2006/relationships">
+  <p:cSld>
+    <p:bg>
+      <p:bgPr>
+        <a:solidFill>
+          <a:srgbClr val="1F2A44"/>
+        </a:solidFill>
+        <a:effectLst/>
+      </p:bgPr>
+    </p:bg>
+    <p:spTree>
+      <p:nvGrpSpPr>
+        <p:cNvPr id="1" name=""/>
+        <p:cNvGrpSpPr/>
+        <p:nvPr/>
+      </p:nvGrpSpPr>
+      <p:grpSpPr/>
+      <p:sp>
+        <p:nvSpPr>
+          <p:cNvPr id="2" name="TextBox 1"/>
+          <p:cNvSpPr txBox="1"/>
+          <p:nvPr/>
+        </p:nvSpPr>
+        <p:spPr>
+          <a:xfrm>
+            <a:off x="640000" y="2300000"/>
+            <a:ext cx="10912000" cy="500000"/>
+          </a:xfrm>
+          <a:prstGeom prst="rect">
+            <a:avLst/>
+          </a:prstGeom>
+          <a:noFill/>
+        </p:spPr>
+        <p:txBody>
+          <a:bodyPr wrap="square">
+            <a:spAutoFit/>
+          </a:bodyPr>
+          <a:lstStyle/>
+          <a:p>
+            <a:pPr>
+              <a:spcAft>
+                <a:spcPts val="810"/>
+              </a:spcAft>
+            </a:pPr>
+            <a:r>
+              <a:rPr sz="1800" b="1">
+                <a:solidFill>
+                  <a:srgbClr val="F4B183"/>
+                </a:solidFill>
+                <a:latin typeface="Nunito Sans"/>
+              </a:rPr>
+              <a:t>BLOQUE 2</a:t>
+            </a:r>
+          </a:p>
+        </p:txBody>
+      </p:sp>
+      <p:sp>
+        <p:nvSpPr>
+          <p:cNvPr id="3" name="TextBox 2"/>
+          <p:cNvSpPr txBox="1"/>
+          <p:nvPr/>
+        </p:nvSpPr>
+        <p:spPr>
+          <a:xfrm>
+            <a:off x="640000" y="2800000"/>
+            <a:ext cx="10912000" cy="800000"/>
+          </a:xfrm>
+          <a:prstGeom prst="rect">
+            <a:avLst/>
+          </a:prstGeom>
+          <a:noFill/>
+        </p:spPr>
+        <p:txBody>
+          <a:bodyPr wrap="square">
+            <a:spAutoFit/>
+          </a:bodyPr>
+          <a:lstStyle/>
+          <a:p>
+            <a:pPr>
+              <a:spcAft>
+                <a:spcPts val="2160"/>
+              </a:spcAft>
+            </a:pPr>
+            <a:r>
+              <a:rPr sz="4800" b="1">
+                <a:solidFill>
+                  <a:srgbClr val="FBF7EF"/>
+                </a:solidFill>
+                <a:latin typeface="Fredoka"/>
+              </a:rPr>
+              <a:t>Casos resueltos</a:t>
+            </a:r>
+          </a:p>
+        </p:txBody>
+      </p:sp>
     </p:spTree>
   </p:cSld>
   <p:clrMapOvr>
